--- a/it/slides/04-Architettura_dei_Calcolatori-Informazione_Digitale.pptx
+++ b/it/slides/04-Architettura_dei_Calcolatori-Informazione_Digitale.pptx
@@ -126,13 +126,13 @@
   <p:extLst>
     <p:ext uri="{521415D9-36F7-43E2-AB2F-B90AF26B5E84}">
       <p14:sectionLst xmlns:p14="http://schemas.microsoft.com/office/powerpoint/2010/main">
-        <p14:section name="Apertura" id="{310bac31-ce4e-1987-adff-c5ab19a0d95b}">
+        <p14:section name="Apertura" id="{3eea4372-7909-1902-15bd-eb0b9d451d95}">
           <p14:sldIdLst>
             <p14:sldId id="256"/>
             <p14:sldId id="257"/>
           </p14:sldIdLst>
         </p14:section>
-        <p14:section name="Informazione" id="{24dd1780-5286-ee62-74d4-3aa642aeb15c}">
+        <p14:section name="Informazione" id="{b0cf88dd-6dbb-59d1-32a4-4eb7000dfda1}">
           <p14:sldIdLst>
             <p14:sldId id="258"/>
             <p14:sldId id="259"/>
@@ -142,7 +142,7 @@
             <p14:sldId id="263"/>
           </p14:sldIdLst>
         </p14:section>
-        <p14:section name="Testo" id="{ec2365d9-f0a0-7a03-099e-9e6bec534d0a}">
+        <p14:section name="Testo" id="{366d337a-a36a-4635-7c9a-441d6ff708b4}">
           <p14:sldIdLst>
             <p14:sldId id="264"/>
             <p14:sldId id="265"/>
@@ -150,12 +150,12 @@
             <p14:sldId id="267"/>
           </p14:sldIdLst>
         </p14:section>
-        <p14:section name="Strutture dati" id="{95de726d-ee7a-6280-673b-2fb48971db79}">
+        <p14:section name="Strutture dati" id="{925f74ec-a307-dca8-d541-07afa5674cee}">
           <p14:sldIdLst>
             <p14:sldId id="268"/>
           </p14:sldIdLst>
         </p14:section>
-        <p14:section name="Dati e algoritmi" id="{32b06245-e520-1329-99f2-10842f6d6adf}">
+        <p14:section name="Dati e algoritmi" id="{45792abd-bcc6-2176-da47-e211aa828eb0}">
           <p14:sldIdLst>
             <p14:sldId id="269"/>
             <p14:sldId id="270"/>
@@ -571,6 +571,8 @@
             <a:r>
               <a:rPr lang="en-US" dirty="0"/>
               <a:t>Nella Lezione 02 avete battuto 0x07e0, 255, .asciz e .word senza sapere esattamente che cosa fossero. Questa lezione dà loro un nome. La tesi sta nel sottotitolo: dentro la macchina tutto è una configurazione di bit, che si tratti di un numero, di un colore, di una lettera o di un elenco. La lezione è ampia più che profonda: i numeri sono trattati formalmente nelle due lezioni successive; qui imparate a leggere i bit e a vedere che il loro significato è questione di accordi.
+Stato di apprendimento: DA COMPRENDERE OGGI, alla fine di questa lezione lo spiegate, lo seguite passo passo e lo applicate da soli; DA UTILIZZARE OGGI, oggi seguite e usate la ricetta; come funziona dentro si spiega più avanti, o non fa parte del corso; DA COMPRENDERE PIÙ AVANTI, riconoscete il nome e lo scopo; lo spiega una lezione successiva. Una slide senza etichetta è contesto: una storia, un esempio, una domanda, un esercizio.
+Stato di apprendimento di questa lezione. DA COMPRENDERE OGGI: analogico e digitale; bit, byte, parola; l'esadecimale; la notazione posizionale; un colore è un numero; caratteri e stringhe; l'ordine little-endian; le strutture dati; gli array in memoria; gli algoritmi. DA UTILIZZARE OGGI: shift come moltiplicazione (Lezione 05) e, usati senza essere studiati nel corso, il programma completo, gli strumenti di PRG32. DA COMPRENDERE PIÙ AVANTI: niente. Una slide senza etichetta è contesto: una storia, un esempio, una domanda, un esercizio.
 Per il docente: Spirale: gli studenti hanno già visto 0x07e0, 255, .asciz e .word nella Lezione 02. Questa lezione dà un nome a quelle cose. Le due lezioni successive (05, 06) trattano i numeri in modo formale.</a:t>
             </a:r>
             <a:endParaRPr lang="en-US" dirty="0"/>
@@ -660,6 +662,7 @@
             <a:r>
               <a:rPr lang="en-US" dirty="0"/>
               <a:t>Una stringa è una sequenza di codici di carattere in byte consecutivi. Il problema è sapere dove finisce. La convenzione del C segna la fine con un byte a zero; quella del Pascal scrive prima la lunghezza. La terza riga è la vostra stringa della Lezione 02: .asciz memorizza gli undici caratteri di HELLO PRG32 seguiti da uno zero, dodici byte in tutto. La funzione che disegna il testo riceve solo l'indirizzo del primo byte e legge finché non trova lo zero. Se lo zero mancasse, proseguirebbe con ciò che segue in memoria.
+DA COMPRENDERE OGGI: caratteri e stringhe.
 Per il docente: I numeri sotto le celle sono i codici ASCII in esadecimale. È la stringa della Lezione 02, passo 2. Che cosa accade se lo zero manca? La funzione continua a leggere ciò che segue in memoria.</a:t>
             </a:r>
             <a:endParaRPr lang="en-US" dirty="0"/>
@@ -749,6 +752,7 @@
             <a:r>
               <a:rPr lang="en-US" dirty="0"/>
               <a:t>L'ASCII ha 128 caratteri, sufficienti solo per l'inglese. Unicode assegna un numero, detto code point, a ogni carattere di ogni sistema di scrittura. UTF-8 memorizza quel numero in uno-quattro byte: i caratteri dell'ASCII conservano il loro unico byte, una lettera accentata ne prende due, il simbolo dell'euro tre, un'emoji quattro. Due conseguenze. Il testo ASCII puro è già UTF-8 valido. E la lunghezza di una stringa in byte non è più la sua lunghezza in caratteri.
+DA COMPRENDERE OGGI: caratteri e stringhe.
 Per il docente: Unicode assegna un numero (code point) a ogni carattere di ogni scrittura; UTF-8 codifica quel numero in uno-quattro byte ed è compatibile con l'ASCII. È la codifica del web e dei vostri file sorgente. Conseguenza: la lunghezza in byte di una stringa non è la sua lunghezza in caratteri.</a:t>
             </a:r>
             <a:endParaRPr lang="en-US" dirty="0"/>
@@ -838,6 +842,7 @@
             <a:r>
               <a:rPr lang="en-US" dirty="0"/>
               <a:t>Una parola sono quattro byte, e la memoria ha un indirizzo per ogni byte: in che ordine si memorizzano i quattro byte? RISC-V è little-endian: il byte meno significativo va all'indirizzo più basso, quindi 0x12345678 si memorizza come 78, 56, 34, 12. L'ordine opposto, big-endian, è quello dei protocolli di rete. Di solito non ci si accorge di nulla, perché lw e sw sono coerenti tra loro. Ci si accorge quando si guarda la memoria byte per byte in un debugger, o si scambiano dati con una macchina diversa.
+DA COMPRENDERE OGGI: l'ordine little-endian.
 Per il docente: I nomi vengono dai Viaggi di Gulliver: da quale estremità rompere l'uovo. In PRG32-QT aprite la vista della memoria su una .word e leggete i byte.</a:t>
             </a:r>
             <a:endParaRPr lang="en-US" dirty="0"/>
@@ -927,6 +932,7 @@
             <a:r>
               <a:rPr lang="en-US" dirty="0"/>
               <a:t>Cinque strutture. Un vettore tiene elementi dello stesso tipo uno dopo l'altro e li raggiunge per indice. Una lista collega ogni elemento al successivo: facile da modificare, lenta da percorrere fino a una posizione. Una pila restituisce per primo ciò che è stato messo per ultimo; ne avete usata una nella Lezione 02 per salvare ra. Un dizionario associa chiavi a valori. Un albero è una gerarchia. Il sesto riquadro è quello che conta per questo corso: nella macchina sono tutti byte in memoria, più una regola per trovare l'elemento successivo.
+DA COMPRENDERE OGGI: le strutture dati.
 Per il docente: Una pila l'avete già usata: il frame che salvava ra nella Lezione 02. Gli esempi sono quelli disegnati sulla slide originale.</a:t>
             </a:r>
             <a:endParaRPr lang="en-US" dirty="0"/>
@@ -1016,6 +1022,7 @@
             <a:r>
               <a:rPr lang="en-US" dirty="0"/>
               <a:t>Un problema è calcolabile se un algoritmo può risolverlo. La macchina di Turing è il modello matematico di un calcolatore con un programma; la macchina di von Neumann è l'architettura che la realizza in hardware. L'ultima riga è quella sorprendente: esistono problemi che nessun algoritmo può risolvere, e quindi che nessun calcolatore risolverà mai, per quanto veloce. L'esempio classico è decidere, per un programma qualsiasi, se si fermerà.
+DA COMPRENDERE OGGI: gli algoritmi.
 Per il docente: L'ultima riga è la tesi di Church-Turing, enunciata in modo informale. Il problema della fermata è l'esempio classico di problema non calcolabile.</a:t>
             </a:r>
             <a:endParaRPr lang="en-US" dirty="0"/>
@@ -1104,7 +1111,8 @@
           <a:p>
             <a:r>
               <a:rPr lang="en-US" dirty="0"/>
-              <a:t>In un algoritmo deterministico lo stesso ingresso produce sempre la stessa sequenza di passi e lo stesso risultato: first_update somma sempre uno. Un algoritmo non deterministico può comportarsi in modo diverso a ogni esecuzione con lo stesso ingresso. Le ragioni comuni sono due: usa di proposito numeri casuali, come un gioco che piazza un nemico a caso, oppure dipende dai tempi di più cose che accadono insieme. Il primo tipo è utile; il secondo è una fonte frequente di bug.</a:t>
+              <a:t>In un algoritmo deterministico lo stesso ingresso produce sempre la stessa sequenza di passi e lo stesso risultato: first_update somma sempre uno. Un algoritmo non deterministico può comportarsi in modo diverso a ogni esecuzione con lo stesso ingresso. Le ragioni comuni sono due: usa di proposito numeri casuali, come un gioco che piazza un nemico a caso, oppure dipende dai tempi di più cose che accadono insieme. Il primo tipo è utile; il secondo è una fonte frequente di bug.
+DA COMPRENDERE OGGI: gli algoritmi.</a:t>
             </a:r>
             <a:endParaRPr lang="en-US" dirty="0"/>
           </a:p>
@@ -1640,6 +1648,7 @@
             <a:r>
               <a:rPr lang="en-US" dirty="0"/>
               <a:t>Cinque frasi da tenere. L'informazione digitale è una configurazione di bit più una convenzione per leggerla. Gli stessi bit possono essere un numero, un colore o due caratteri: decide il programma. L'esadecimale è il binario scritto in modo compatto, quattro bit per cifra. Il testo è fatto di numeri, e le strutture sono byte più una regola. Gli algoritmi trasformano i dati in informazione su cui fondare decisioni. La prossima lezione tratta formalmente la rappresentazione dei numeri, partendo da un segnalino che esce dal bordo sinistro dello schermo.
+Stato di apprendimento, riepilogo. DA COMPRENDERE OGGI: analogico e digitale; bit, byte, parola; l'esadecimale; la notazione posizionale; un colore è un numero; caratteri e stringhe; l'ordine little-endian; le strutture dati; gli array in memoria; gli algoritmi. DA UTILIZZARE OGGI: shift come moltiplicazione (Lezione 05) e, usati senza essere studiati nel corso, il programma completo, gli strumenti di PRG32. DA COMPRENDERE PIÙ AVANTI: niente. Una slide senza etichetta è contesto: una storia, un esempio, una domanda, un esercizio.
 Per il docente: Prossima lezione: la rappresentazione dei numeri, in modo formale.</a:t>
             </a:r>
             <a:endParaRPr lang="en-US" dirty="0"/>
@@ -1729,6 +1738,7 @@
             <a:r>
               <a:rPr lang="en-US" dirty="0"/>
               <a:t>Una grandezza analogica varia con continuità, come una tensione o le lancette di un orologio. Una grandezza digitale è una sequenza di simboli presi da un alfabeto finito, come le cifre di un display. Nella figura la curva liscia è il segnale analogico; la scalinata è la sua versione digitale, ottenuta campionando a istanti regolari e quantizzando ogni campione su uno di pochi livelli. Qualcosa si perde, e qualcosa si guadagna: un numero finito di livelli si può contare, copiare senza errori e controllare. Con due soli livelli il simbolo è il bit.
+DA COMPRENDERE OGGI: analogico e digitale.
 Per il docente: Due livelli si realizzano in modo affidabile con i transistor (spento o acceso): per questo i calcolatori sono binari. L'algebra di Boole (Lezione 08) è la matematica dei due livelli.</a:t>
             </a:r>
             <a:endParaRPr lang="en-US" dirty="0"/>
@@ -1818,6 +1828,7 @@
             <a:r>
               <a:rPr lang="en-US" dirty="0"/>
               <a:t>Le unità dell'informazione, ciascuna legata a qualcosa che avete usato. Un bit è un pulsante. Un nibble, quattro bit, è una cifra esadecimale. Un byte, otto bit, è un carattere ASCII, ed è la ragione per cui la barra della Lezione 02 era larga al massimo 255. Una halfword, sedici bit, è un colore. Una word, o parola, trentadue bit, è un registro e un'istruzione. La regola da ricordare: n bit danno 2 alla n configurazioni. E la didascalia: che cosa significa una configurazione non è scritto nei bit.
+DA COMPRENDERE OGGI: bit, byte, parola.
 Per il docente: n bit danno 2^n configurazioni distinte. Che cosa significa una configurazione non è scritto nei bit: è una convenzione tra chi li scrive e chi li legge. Su RV32 una parola è di 32 bit per definizione dell'architettura.</a:t>
             </a:r>
             <a:endParaRPr lang="en-US" dirty="0"/>
@@ -1907,6 +1918,7 @@
             <a:r>
               <a:rPr lang="en-US" dirty="0"/>
               <a:t>Sedici righe da imparare a memoria, come un tempo le tabelline. Ogni riga dà lo stesso numero in decimale, in binario su quattro bit e in esadecimale con una cifra. Le quattro colonne binarie pesano 8, 4, 2 e 1: 1011 è 8 + 2 + 1 = 11, che l'esadecimale scrive B. Dopo il 9 le cifre esadecimali proseguono con le lettere da A a F per i valori da dieci a quindici. Coprite due colonne e ricostruitele dalla terza finché non vi serve più pensarci.
+DA COMPRENDERE OGGI: l'esadecimale.
 Per il docente: Le colonne del numero binario pesano 8, 4, 2, 1. Questa tabella va imparata a memoria: è la tavola pitagorica di questo corso.</a:t>
             </a:r>
             <a:endParaRPr lang="en-US" dirty="0"/>
@@ -1996,6 +2008,7 @@
             <a:r>
               <a:rPr lang="en-US" dirty="0"/>
               <a:t>In un sistema posizionale una cifra vale il suo valore per il peso della sua posizione, e i pesi sono le potenze della base. La slide legge così il byte 11011001: le posizioni pesano 128, 64, 32, 16, 8, 4, 2 e 1; dove il bit è 1 il peso si somma, dove è 0 no. La somma è 128 + 64 + 16 + 8 + 1 = 217. È esattamente ciò che fate in base dieci senza accorgervene: 217 sono 2 centinaia, 1 decina e 7 unità.
+DA COMPRENDERE OGGI: la notazione posizionale.
 Per il docente: La Lezione 05 dà la formula generale e gli algoritmi di conversione. Qui lo scopo è soltanto leggere un byte.</a:t>
             </a:r>
             <a:endParaRPr lang="en-US" dirty="0"/>
@@ -2085,6 +2098,7 @@
             <a:r>
               <a:rPr lang="en-US" dirty="0"/>
               <a:t>Sedici è due alla quarta, quindi una cifra esadecimale corrisponde esattamente a quattro bit. Per convertire si taglia il numero binario in gruppi di quattro a partire da destra e si sostituisce ogni gruppo usando la tabella: 0000 0111 1110 0000 diventa 0, 7, E, 0. Non serve alcun calcolo. Per questo i programmatori usano l'esadecimale: è il binario scritto in modo compatto. Un registro sono otto cifre esadecimali invece di trentadue bit. Il prefisso 0x annuncia che un numero è esadecimale.
+DA COMPRENDERE OGGI: l'esadecimale.
 Per il docente: 0x07E0 = 7 x 256 + 14 x 16 = 1792 + 224 = 2016. Il valore decimale qui è inutile: conta la configurazione di bit, come mostra la slide successiva.</a:t>
             </a:r>
             <a:endParaRPr lang="en-US" dirty="0"/>
@@ -2174,6 +2188,7 @@
             <a:r>
               <a:rPr lang="en-US" dirty="0"/>
               <a:t>Qui si apre il verde della Lezione 02. Un colore PRG32 sono sedici bit divisi in tre campi: cinque bit di rosso, sei di verde, cinque di blu. Il formato si chiama RGB565. In 0x07E0 il campo rosso è 00000, il campo verde è 111111 e il campo blu è 00000: verde al massimo e nient'altro. Gli otto campioni mostrano altre combinazioni: il giallo è rosso più verde, il bianco è tutto. La frase in fondo è la lezione dell'intera lezione: gli stessi sedici bit potrebbero essere tutt'altro.
+DA COMPRENDERE OGGI: un colore è un numero.
 Per il docente: L'occhio è più sensibile al verde: per questo al verde spetta il bit in più. Esercizio: che colore è 0xF81F? (rosso e blu al massimo: magenta). Le costanti dei colori sono quelle di prg32.h.</a:t>
             </a:r>
             <a:endParaRPr lang="en-US" dirty="0"/>
@@ -2263,6 +2278,7 @@
             <a:r>
               <a:rPr lang="en-US" dirty="0"/>
               <a:t>L'ASCII assegna un numero a ogni carattere e lo fa stare in un byte. Tre osservazioni dalla tabella. La A maiuscola è 65 e la a minuscola è 97: differiscono di 32, cioè di un solo bit. Il carattere «0» è 48, non zero: una cifra battuta sulla tastiera non è ancora un numero. E ci sono caratteri che non si stampano: l'a capo, 10, e NUL, 0, che incontrerete nella prossima slide come fine di una stringa.
+DA COMPRENDERE OGGI: caratteri e stringhe.
 Per il docente: L'ASCII (1963) usa 7 bit: 128 caratteri, solo per l'inglese. Maiuscole e minuscole differiscono solo nel bit 5: xori con 0x20 scambia maiuscolo e minuscolo, un primo assaggio di algebra di Boole sul testo.</a:t>
             </a:r>
             <a:endParaRPr lang="en-US" dirty="0"/>
@@ -3400,6 +3416,420 @@
       </p:pic>
       <p:sp>
         <p:nvSpPr>
+          <p:cNvPr id="15" name="Shape 12"/>
+          <p:cNvSpPr/>
+          <p:nvPr/>
+        </p:nvSpPr>
+        <p:spPr>
+          <a:xfrm>
+            <a:off x="8910777" y="91440"/>
+            <a:ext cx="2732278" cy="274320"/>
+          </a:xfrm>
+          <a:prstGeom prst="rect">
+            <a:avLst/>
+          </a:prstGeom>
+          <a:solidFill>
+            <a:srgbClr val="F3E8FF"/>
+          </a:solidFill>
+          <a:ln w="12700">
+            <a:solidFill>
+              <a:srgbClr val="7E22CE"/>
+            </a:solidFill>
+            <a:prstDash val="dash"/>
+          </a:ln>
+        </p:spPr>
+      </p:sp>
+      <p:sp>
+        <p:nvSpPr>
+          <p:cNvPr id="16" name="Shape 13"/>
+          <p:cNvSpPr/>
+          <p:nvPr/>
+        </p:nvSpPr>
+        <p:spPr>
+          <a:xfrm>
+            <a:off x="8938209" y="128016"/>
+            <a:ext cx="45720" cy="45720"/>
+          </a:xfrm>
+          <a:prstGeom prst="rect">
+            <a:avLst/>
+          </a:prstGeom>
+          <a:solidFill>
+            <a:srgbClr val="7E22CE"/>
+          </a:solidFill>
+          <a:ln w="12700">
+            <a:solidFill>
+              <a:srgbClr val="7E22CE"/>
+            </a:solidFill>
+            <a:prstDash val="solid"/>
+          </a:ln>
+        </p:spPr>
+      </p:sp>
+      <p:sp>
+        <p:nvSpPr>
+          <p:cNvPr id="17" name="Shape 14"/>
+          <p:cNvSpPr/>
+          <p:nvPr/>
+        </p:nvSpPr>
+        <p:spPr>
+          <a:xfrm>
+            <a:off x="8938209" y="205740"/>
+            <a:ext cx="45720" cy="45720"/>
+          </a:xfrm>
+          <a:prstGeom prst="rect">
+            <a:avLst/>
+          </a:prstGeom>
+          <a:solidFill>
+            <a:srgbClr val="7E22CE"/>
+          </a:solidFill>
+          <a:ln w="12700">
+            <a:solidFill>
+              <a:srgbClr val="7E22CE"/>
+            </a:solidFill>
+            <a:prstDash val="solid"/>
+          </a:ln>
+        </p:spPr>
+      </p:sp>
+      <p:sp>
+        <p:nvSpPr>
+          <p:cNvPr id="18" name="Shape 15"/>
+          <p:cNvSpPr/>
+          <p:nvPr/>
+        </p:nvSpPr>
+        <p:spPr>
+          <a:xfrm>
+            <a:off x="8938209" y="283464"/>
+            <a:ext cx="45720" cy="45720"/>
+          </a:xfrm>
+          <a:prstGeom prst="rect">
+            <a:avLst/>
+          </a:prstGeom>
+          <a:solidFill>
+            <a:srgbClr val="7E22CE"/>
+          </a:solidFill>
+          <a:ln w="12700">
+            <a:solidFill>
+              <a:srgbClr val="7E22CE"/>
+            </a:solidFill>
+            <a:prstDash val="solid"/>
+          </a:ln>
+        </p:spPr>
+      </p:sp>
+      <p:pic>
+        <p:nvPicPr>
+          <p:cNvPr id="19" name="Image 1" descr="preencoded.png">    </p:cNvPr>
+          <p:cNvPicPr>
+            <a:picLocks noChangeAspect="1"/>
+          </p:cNvPicPr>
+          <p:nvPr/>
+        </p:nvPicPr>
+        <p:blipFill>
+          <a:blip r:embed="rId2"/>
+          <a:stretch>
+            <a:fillRect/>
+          </a:stretch>
+        </p:blipFill>
+        <p:spPr>
+          <a:xfrm>
+            <a:off x="9038793" y="128016"/>
+            <a:ext cx="201168" cy="201168"/>
+          </a:xfrm>
+          <a:prstGeom prst="rect">
+            <a:avLst/>
+          </a:prstGeom>
+        </p:spPr>
+      </p:pic>
+      <p:sp>
+        <p:nvSpPr>
+          <p:cNvPr id="20" name="Text 16"/>
+          <p:cNvSpPr txBox="1"/>
+          <p:nvPr/>
+        </p:nvSpPr>
+        <p:spPr>
+          <a:xfrm>
+            <a:off x="9294825" y="91440"/>
+            <a:ext cx="2311654" cy="274320"/>
+          </a:xfrm>
+          <a:prstGeom prst="rect">
+            <a:avLst/>
+          </a:prstGeom>
+          <a:noFill/>
+          <a:ln/>
+        </p:spPr>
+        <p:txBody>
+          <a:bodyPr wrap="square" lIns="0" tIns="0" rIns="0" bIns="0" rtlCol="0" anchor="ctr"/>
+          <a:lstStyle/>
+          <a:p>
+            <a:pPr indent="0" marL="0">
+              <a:buNone/>
+            </a:pPr>
+            <a:r>
+              <a:rPr lang="en-US" sz="1100" b="1" dirty="0">
+                <a:solidFill>
+                  <a:srgbClr val="6B21A8"/>
+                </a:solidFill>
+                <a:latin typeface="Calibri" pitchFamily="34" charset="0"/>
+                <a:ea typeface="Calibri" pitchFamily="34" charset="-122"/>
+                <a:cs typeface="Calibri" pitchFamily="34" charset="-120"/>
+              </a:rPr>
+              <a:t>DA COMPRENDERE PIÙ AVANTI</a:t>
+            </a:r>
+            <a:endParaRPr lang="en-US" sz="1100" dirty="0"/>
+          </a:p>
+        </p:txBody>
+      </p:sp>
+      <p:sp>
+        <p:nvSpPr>
+          <p:cNvPr id="21" name="Shape 17"/>
+          <p:cNvSpPr/>
+          <p:nvPr/>
+        </p:nvSpPr>
+        <p:spPr>
+          <a:xfrm>
+            <a:off x="6675069" y="91440"/>
+            <a:ext cx="2125980" cy="274320"/>
+          </a:xfrm>
+          <a:prstGeom prst="rect">
+            <a:avLst/>
+          </a:prstGeom>
+          <a:solidFill>
+            <a:srgbClr val="FEF3C7"/>
+          </a:solidFill>
+          <a:ln w="12700">
+            <a:solidFill>
+              <a:srgbClr val="B45309"/>
+            </a:solidFill>
+            <a:prstDash val="solid"/>
+          </a:ln>
+        </p:spPr>
+      </p:sp>
+      <p:sp>
+        <p:nvSpPr>
+          <p:cNvPr id="22" name="Shape 18"/>
+          <p:cNvSpPr/>
+          <p:nvPr/>
+        </p:nvSpPr>
+        <p:spPr>
+          <a:xfrm>
+            <a:off x="6675069" y="91440"/>
+            <a:ext cx="27432" cy="274320"/>
+          </a:xfrm>
+          <a:prstGeom prst="rect">
+            <a:avLst/>
+          </a:prstGeom>
+          <a:solidFill>
+            <a:srgbClr val="B45309"/>
+          </a:solidFill>
+          <a:ln w="12700">
+            <a:solidFill>
+              <a:srgbClr val="B45309"/>
+            </a:solidFill>
+            <a:prstDash val="solid"/>
+          </a:ln>
+        </p:spPr>
+      </p:sp>
+      <p:sp>
+        <p:nvSpPr>
+          <p:cNvPr id="23" name="Shape 19"/>
+          <p:cNvSpPr/>
+          <p:nvPr/>
+        </p:nvSpPr>
+        <p:spPr>
+          <a:xfrm>
+            <a:off x="6729933" y="91440"/>
+            <a:ext cx="27432" cy="274320"/>
+          </a:xfrm>
+          <a:prstGeom prst="rect">
+            <a:avLst/>
+          </a:prstGeom>
+          <a:solidFill>
+            <a:srgbClr val="B45309"/>
+          </a:solidFill>
+          <a:ln w="12700">
+            <a:solidFill>
+              <a:srgbClr val="B45309"/>
+            </a:solidFill>
+            <a:prstDash val="solid"/>
+          </a:ln>
+        </p:spPr>
+      </p:sp>
+      <p:pic>
+        <p:nvPicPr>
+          <p:cNvPr id="24" name="Image 2" descr="preencoded.png">    </p:cNvPr>
+          <p:cNvPicPr>
+            <a:picLocks noChangeAspect="1"/>
+          </p:cNvPicPr>
+          <p:nvPr/>
+        </p:nvPicPr>
+        <p:blipFill>
+          <a:blip r:embed="rId3"/>
+          <a:stretch>
+            <a:fillRect/>
+          </a:stretch>
+        </p:blipFill>
+        <p:spPr>
+          <a:xfrm>
+            <a:off x="6803085" y="128016"/>
+            <a:ext cx="201168" cy="201168"/>
+          </a:xfrm>
+          <a:prstGeom prst="rect">
+            <a:avLst/>
+          </a:prstGeom>
+        </p:spPr>
+      </p:pic>
+      <p:sp>
+        <p:nvSpPr>
+          <p:cNvPr id="25" name="Text 20"/>
+          <p:cNvSpPr txBox="1"/>
+          <p:nvPr/>
+        </p:nvSpPr>
+        <p:spPr>
+          <a:xfrm>
+            <a:off x="7059117" y="91440"/>
+            <a:ext cx="1705356" cy="274320"/>
+          </a:xfrm>
+          <a:prstGeom prst="rect">
+            <a:avLst/>
+          </a:prstGeom>
+          <a:noFill/>
+          <a:ln/>
+        </p:spPr>
+        <p:txBody>
+          <a:bodyPr wrap="square" lIns="0" tIns="0" rIns="0" bIns="0" rtlCol="0" anchor="ctr"/>
+          <a:lstStyle/>
+          <a:p>
+            <a:pPr indent="0" marL="0">
+              <a:buNone/>
+            </a:pPr>
+            <a:r>
+              <a:rPr lang="en-US" sz="1100" b="1" dirty="0">
+                <a:solidFill>
+                  <a:srgbClr val="92400E"/>
+                </a:solidFill>
+                <a:latin typeface="Calibri" pitchFamily="34" charset="0"/>
+                <a:ea typeface="Calibri" pitchFamily="34" charset="-122"/>
+                <a:cs typeface="Calibri" pitchFamily="34" charset="-120"/>
+              </a:rPr>
+              <a:t>DA UTILIZZARE OGGI</a:t>
+            </a:r>
+            <a:endParaRPr lang="en-US" sz="1100" dirty="0"/>
+          </a:p>
+        </p:txBody>
+      </p:sp>
+      <p:sp>
+        <p:nvSpPr>
+          <p:cNvPr id="26" name="Shape 21"/>
+          <p:cNvSpPr/>
+          <p:nvPr/>
+        </p:nvSpPr>
+        <p:spPr>
+          <a:xfrm>
+            <a:off x="4352747" y="91440"/>
+            <a:ext cx="2212594" cy="274320"/>
+          </a:xfrm>
+          <a:prstGeom prst="rect">
+            <a:avLst/>
+          </a:prstGeom>
+          <a:solidFill>
+            <a:srgbClr val="E0F2FE"/>
+          </a:solidFill>
+          <a:ln w="12700">
+            <a:solidFill>
+              <a:srgbClr val="0369A1"/>
+            </a:solidFill>
+            <a:prstDash val="solid"/>
+          </a:ln>
+        </p:spPr>
+      </p:sp>
+      <p:sp>
+        <p:nvSpPr>
+          <p:cNvPr id="27" name="Shape 22"/>
+          <p:cNvSpPr/>
+          <p:nvPr/>
+        </p:nvSpPr>
+        <p:spPr>
+          <a:xfrm>
+            <a:off x="4352747" y="91440"/>
+            <a:ext cx="73152" cy="274320"/>
+          </a:xfrm>
+          <a:prstGeom prst="rect">
+            <a:avLst/>
+          </a:prstGeom>
+          <a:solidFill>
+            <a:srgbClr val="0369A1"/>
+          </a:solidFill>
+          <a:ln w="12700">
+            <a:solidFill>
+              <a:srgbClr val="0369A1"/>
+            </a:solidFill>
+            <a:prstDash val="solid"/>
+          </a:ln>
+        </p:spPr>
+      </p:sp>
+      <p:pic>
+        <p:nvPicPr>
+          <p:cNvPr id="28" name="Image 3" descr="preencoded.png">    </p:cNvPr>
+          <p:cNvPicPr>
+            <a:picLocks noChangeAspect="1"/>
+          </p:cNvPicPr>
+          <p:nvPr/>
+        </p:nvPicPr>
+        <p:blipFill>
+          <a:blip r:embed="rId4"/>
+          <a:stretch>
+            <a:fillRect/>
+          </a:stretch>
+        </p:blipFill>
+        <p:spPr>
+          <a:xfrm>
+            <a:off x="4480763" y="128016"/>
+            <a:ext cx="201168" cy="201168"/>
+          </a:xfrm>
+          <a:prstGeom prst="rect">
+            <a:avLst/>
+          </a:prstGeom>
+        </p:spPr>
+      </p:pic>
+      <p:sp>
+        <p:nvSpPr>
+          <p:cNvPr id="29" name="Text 23"/>
+          <p:cNvSpPr txBox="1"/>
+          <p:nvPr/>
+        </p:nvSpPr>
+        <p:spPr>
+          <a:xfrm>
+            <a:off x="4736795" y="91440"/>
+            <a:ext cx="1791970" cy="274320"/>
+          </a:xfrm>
+          <a:prstGeom prst="rect">
+            <a:avLst/>
+          </a:prstGeom>
+          <a:noFill/>
+          <a:ln/>
+        </p:spPr>
+        <p:txBody>
+          <a:bodyPr wrap="square" lIns="0" tIns="0" rIns="0" bIns="0" rtlCol="0" anchor="ctr"/>
+          <a:lstStyle/>
+          <a:p>
+            <a:pPr indent="0" marL="0">
+              <a:buNone/>
+            </a:pPr>
+            <a:r>
+              <a:rPr lang="en-US" sz="1100" b="1" dirty="0">
+                <a:solidFill>
+                  <a:srgbClr val="075985"/>
+                </a:solidFill>
+                <a:latin typeface="Calibri" pitchFamily="34" charset="0"/>
+                <a:ea typeface="Calibri" pitchFamily="34" charset="-122"/>
+                <a:cs typeface="Calibri" pitchFamily="34" charset="-120"/>
+              </a:rPr>
+              <a:t>DA COMPRENDERE OGGI</a:t>
+            </a:r>
+            <a:endParaRPr lang="en-US" sz="1100" dirty="0"/>
+          </a:p>
+        </p:txBody>
+      </p:sp>
+      <p:sp>
+        <p:nvSpPr>
           <p:cNvPr id="25" name="Slide Number Placeholder 0"/>
           <p:cNvSpPr>
             <a:spLocks noGrp="1"/>
@@ -5618,6 +6048,133 @@
               <a:t>La z di .asciz significa terminata da zero: l'assemblatore memorizza dodici byte per undici caratteri. prg32_gfx_text8 riceve in a2 solo l'indirizzo del primo byte, e legge finché non trova lo zero.</a:t>
             </a:r>
             <a:endParaRPr lang="en-US" sz="1700" dirty="0"/>
+          </a:p>
+        </p:txBody>
+      </p:sp>
+      <p:sp>
+        <p:nvSpPr>
+          <p:cNvPr id="54" name="Shape 52"/>
+          <p:cNvSpPr/>
+          <p:nvPr/>
+        </p:nvSpPr>
+        <p:spPr>
+          <a:xfrm>
+            <a:off x="7920304" y="91440"/>
+            <a:ext cx="3722751" cy="274320"/>
+          </a:xfrm>
+          <a:prstGeom prst="rect">
+            <a:avLst/>
+          </a:prstGeom>
+          <a:solidFill>
+            <a:srgbClr val="E0F2FE"/>
+          </a:solidFill>
+          <a:ln w="12700">
+            <a:solidFill>
+              <a:srgbClr val="0369A1"/>
+            </a:solidFill>
+            <a:prstDash val="solid"/>
+          </a:ln>
+        </p:spPr>
+      </p:sp>
+      <p:sp>
+        <p:nvSpPr>
+          <p:cNvPr id="55" name="Shape 53"/>
+          <p:cNvSpPr/>
+          <p:nvPr/>
+        </p:nvSpPr>
+        <p:spPr>
+          <a:xfrm>
+            <a:off x="7920304" y="91440"/>
+            <a:ext cx="73152" cy="274320"/>
+          </a:xfrm>
+          <a:prstGeom prst="rect">
+            <a:avLst/>
+          </a:prstGeom>
+          <a:solidFill>
+            <a:srgbClr val="0369A1"/>
+          </a:solidFill>
+          <a:ln w="12700">
+            <a:solidFill>
+              <a:srgbClr val="0369A1"/>
+            </a:solidFill>
+            <a:prstDash val="solid"/>
+          </a:ln>
+        </p:spPr>
+      </p:sp>
+      <p:pic>
+        <p:nvPicPr>
+          <p:cNvPr id="56" name="Image 0" descr="preencoded.png">    </p:cNvPr>
+          <p:cNvPicPr>
+            <a:picLocks noChangeAspect="1"/>
+          </p:cNvPicPr>
+          <p:nvPr/>
+        </p:nvPicPr>
+        <p:blipFill>
+          <a:blip r:embed="rId1"/>
+          <a:stretch>
+            <a:fillRect/>
+          </a:stretch>
+        </p:blipFill>
+        <p:spPr>
+          <a:xfrm>
+            <a:off x="8048320" y="128016"/>
+            <a:ext cx="201168" cy="201168"/>
+          </a:xfrm>
+          <a:prstGeom prst="rect">
+            <a:avLst/>
+          </a:prstGeom>
+        </p:spPr>
+      </p:pic>
+      <p:sp>
+        <p:nvSpPr>
+          <p:cNvPr id="57" name="Text 54"/>
+          <p:cNvSpPr txBox="1"/>
+          <p:nvPr/>
+        </p:nvSpPr>
+        <p:spPr>
+          <a:xfrm>
+            <a:off x="8304352" y="91440"/>
+            <a:ext cx="3302127" cy="274320"/>
+          </a:xfrm>
+          <a:prstGeom prst="rect">
+            <a:avLst/>
+          </a:prstGeom>
+          <a:noFill/>
+          <a:ln/>
+        </p:spPr>
+        <p:txBody>
+          <a:bodyPr wrap="square" lIns="0" tIns="0" rIns="0" bIns="0" rtlCol="0" anchor="ctr"/>
+          <a:lstStyle/>
+          <a:p>
+            <a:pPr indent="0" marL="0">
+              <a:buNone/>
+            </a:pPr>
+            <a:r>
+              <a:rPr lang="en-US" sz="1100" b="1" dirty="0">
+                <a:solidFill>
+                  <a:srgbClr val="075985"/>
+                </a:solidFill>
+                <a:latin typeface="Calibri" pitchFamily="34" charset="0"/>
+                <a:ea typeface="Calibri" pitchFamily="34" charset="-122"/>
+                <a:cs typeface="Calibri" pitchFamily="34" charset="-120"/>
+              </a:rPr>
+              <a:t>DA COMPRENDERE OGGI</a:t>
+            </a:r>
+            <a:pPr indent="0" marL="0">
+              <a:buNone/>
+            </a:pPr>
+            <a:r>
+              <a:rPr lang="en-US" sz="1100" dirty="0">
+                <a:solidFill>
+                  <a:srgbClr val="075985"/>
+                </a:solidFill>
+                <a:latin typeface="Calibri" pitchFamily="34" charset="0"/>
+                <a:ea typeface="Calibri" pitchFamily="34" charset="-122"/>
+                <a:cs typeface="Calibri" pitchFamily="34" charset="-120"/>
+              </a:rPr>
+              <a:t> · caratteri e stringhe</a:t>
+            </a:r>
+            <a:endParaRPr lang="en-US" sz="1100" dirty="0"/>
           </a:p>
         </p:txBody>
       </p:sp>
@@ -7452,6 +8009,133 @@
       </p:sp>
       <p:sp>
         <p:nvSpPr>
+          <p:cNvPr id="5" name="Shape 2"/>
+          <p:cNvSpPr/>
+          <p:nvPr/>
+        </p:nvSpPr>
+        <p:spPr>
+          <a:xfrm>
+            <a:off x="7920304" y="91440"/>
+            <a:ext cx="3722751" cy="274320"/>
+          </a:xfrm>
+          <a:prstGeom prst="rect">
+            <a:avLst/>
+          </a:prstGeom>
+          <a:solidFill>
+            <a:srgbClr val="E0F2FE"/>
+          </a:solidFill>
+          <a:ln w="12700">
+            <a:solidFill>
+              <a:srgbClr val="0369A1"/>
+            </a:solidFill>
+            <a:prstDash val="solid"/>
+          </a:ln>
+        </p:spPr>
+      </p:sp>
+      <p:sp>
+        <p:nvSpPr>
+          <p:cNvPr id="6" name="Shape 3"/>
+          <p:cNvSpPr/>
+          <p:nvPr/>
+        </p:nvSpPr>
+        <p:spPr>
+          <a:xfrm>
+            <a:off x="7920304" y="91440"/>
+            <a:ext cx="73152" cy="274320"/>
+          </a:xfrm>
+          <a:prstGeom prst="rect">
+            <a:avLst/>
+          </a:prstGeom>
+          <a:solidFill>
+            <a:srgbClr val="0369A1"/>
+          </a:solidFill>
+          <a:ln w="12700">
+            <a:solidFill>
+              <a:srgbClr val="0369A1"/>
+            </a:solidFill>
+            <a:prstDash val="solid"/>
+          </a:ln>
+        </p:spPr>
+      </p:sp>
+      <p:pic>
+        <p:nvPicPr>
+          <p:cNvPr id="7" name="Image 0" descr="preencoded.png">    </p:cNvPr>
+          <p:cNvPicPr>
+            <a:picLocks noChangeAspect="1"/>
+          </p:cNvPicPr>
+          <p:nvPr/>
+        </p:nvPicPr>
+        <p:blipFill>
+          <a:blip r:embed="rId1"/>
+          <a:stretch>
+            <a:fillRect/>
+          </a:stretch>
+        </p:blipFill>
+        <p:spPr>
+          <a:xfrm>
+            <a:off x="8048320" y="128016"/>
+            <a:ext cx="201168" cy="201168"/>
+          </a:xfrm>
+          <a:prstGeom prst="rect">
+            <a:avLst/>
+          </a:prstGeom>
+        </p:spPr>
+      </p:pic>
+      <p:sp>
+        <p:nvSpPr>
+          <p:cNvPr id="8" name="Text 4"/>
+          <p:cNvSpPr txBox="1"/>
+          <p:nvPr/>
+        </p:nvSpPr>
+        <p:spPr>
+          <a:xfrm>
+            <a:off x="8304352" y="91440"/>
+            <a:ext cx="3302127" cy="274320"/>
+          </a:xfrm>
+          <a:prstGeom prst="rect">
+            <a:avLst/>
+          </a:prstGeom>
+          <a:noFill/>
+          <a:ln/>
+        </p:spPr>
+        <p:txBody>
+          <a:bodyPr wrap="square" lIns="0" tIns="0" rIns="0" bIns="0" rtlCol="0" anchor="ctr"/>
+          <a:lstStyle/>
+          <a:p>
+            <a:pPr indent="0" marL="0">
+              <a:buNone/>
+            </a:pPr>
+            <a:r>
+              <a:rPr lang="en-US" sz="1100" b="1" dirty="0">
+                <a:solidFill>
+                  <a:srgbClr val="075985"/>
+                </a:solidFill>
+                <a:latin typeface="Calibri" pitchFamily="34" charset="0"/>
+                <a:ea typeface="Calibri" pitchFamily="34" charset="-122"/>
+                <a:cs typeface="Calibri" pitchFamily="34" charset="-120"/>
+              </a:rPr>
+              <a:t>DA COMPRENDERE OGGI</a:t>
+            </a:r>
+            <a:pPr indent="0" marL="0">
+              <a:buNone/>
+            </a:pPr>
+            <a:r>
+              <a:rPr lang="en-US" sz="1100" dirty="0">
+                <a:solidFill>
+                  <a:srgbClr val="075985"/>
+                </a:solidFill>
+                <a:latin typeface="Calibri" pitchFamily="34" charset="0"/>
+                <a:ea typeface="Calibri" pitchFamily="34" charset="-122"/>
+                <a:cs typeface="Calibri" pitchFamily="34" charset="-120"/>
+              </a:rPr>
+              <a:t> · caratteri e stringhe</a:t>
+            </a:r>
+            <a:endParaRPr lang="en-US" sz="1100" dirty="0"/>
+          </a:p>
+        </p:txBody>
+      </p:sp>
+      <p:sp>
+        <p:nvSpPr>
           <p:cNvPr id="25" name="Slide Number Placeholder 0"/>
           <p:cNvSpPr>
             <a:spLocks noGrp="1"/>
@@ -8590,6 +9274,133 @@
       </p:sp>
       <p:sp>
         <p:nvSpPr>
+          <p:cNvPr id="28" name="Shape 26"/>
+          <p:cNvSpPr/>
+          <p:nvPr/>
+        </p:nvSpPr>
+        <p:spPr>
+          <a:xfrm>
+            <a:off x="7788986" y="91440"/>
+            <a:ext cx="3854069" cy="274320"/>
+          </a:xfrm>
+          <a:prstGeom prst="rect">
+            <a:avLst/>
+          </a:prstGeom>
+          <a:solidFill>
+            <a:srgbClr val="E0F2FE"/>
+          </a:solidFill>
+          <a:ln w="12700">
+            <a:solidFill>
+              <a:srgbClr val="0369A1"/>
+            </a:solidFill>
+            <a:prstDash val="solid"/>
+          </a:ln>
+        </p:spPr>
+      </p:sp>
+      <p:sp>
+        <p:nvSpPr>
+          <p:cNvPr id="29" name="Shape 27"/>
+          <p:cNvSpPr/>
+          <p:nvPr/>
+        </p:nvSpPr>
+        <p:spPr>
+          <a:xfrm>
+            <a:off x="7788986" y="91440"/>
+            <a:ext cx="73152" cy="274320"/>
+          </a:xfrm>
+          <a:prstGeom prst="rect">
+            <a:avLst/>
+          </a:prstGeom>
+          <a:solidFill>
+            <a:srgbClr val="0369A1"/>
+          </a:solidFill>
+          <a:ln w="12700">
+            <a:solidFill>
+              <a:srgbClr val="0369A1"/>
+            </a:solidFill>
+            <a:prstDash val="solid"/>
+          </a:ln>
+        </p:spPr>
+      </p:sp>
+      <p:pic>
+        <p:nvPicPr>
+          <p:cNvPr id="30" name="Image 0" descr="preencoded.png">    </p:cNvPr>
+          <p:cNvPicPr>
+            <a:picLocks noChangeAspect="1"/>
+          </p:cNvPicPr>
+          <p:nvPr/>
+        </p:nvPicPr>
+        <p:blipFill>
+          <a:blip r:embed="rId1"/>
+          <a:stretch>
+            <a:fillRect/>
+          </a:stretch>
+        </p:blipFill>
+        <p:spPr>
+          <a:xfrm>
+            <a:off x="7917002" y="128016"/>
+            <a:ext cx="201168" cy="201168"/>
+          </a:xfrm>
+          <a:prstGeom prst="rect">
+            <a:avLst/>
+          </a:prstGeom>
+        </p:spPr>
+      </p:pic>
+      <p:sp>
+        <p:nvSpPr>
+          <p:cNvPr id="31" name="Text 28"/>
+          <p:cNvSpPr txBox="1"/>
+          <p:nvPr/>
+        </p:nvSpPr>
+        <p:spPr>
+          <a:xfrm>
+            <a:off x="8173034" y="91440"/>
+            <a:ext cx="3433445" cy="274320"/>
+          </a:xfrm>
+          <a:prstGeom prst="rect">
+            <a:avLst/>
+          </a:prstGeom>
+          <a:noFill/>
+          <a:ln/>
+        </p:spPr>
+        <p:txBody>
+          <a:bodyPr wrap="square" lIns="0" tIns="0" rIns="0" bIns="0" rtlCol="0" anchor="ctr"/>
+          <a:lstStyle/>
+          <a:p>
+            <a:pPr indent="0" marL="0">
+              <a:buNone/>
+            </a:pPr>
+            <a:r>
+              <a:rPr lang="en-US" sz="1100" b="1" dirty="0">
+                <a:solidFill>
+                  <a:srgbClr val="075985"/>
+                </a:solidFill>
+                <a:latin typeface="Calibri" pitchFamily="34" charset="0"/>
+                <a:ea typeface="Calibri" pitchFamily="34" charset="-122"/>
+                <a:cs typeface="Calibri" pitchFamily="34" charset="-120"/>
+              </a:rPr>
+              <a:t>DA COMPRENDERE OGGI</a:t>
+            </a:r>
+            <a:pPr indent="0" marL="0">
+              <a:buNone/>
+            </a:pPr>
+            <a:r>
+              <a:rPr lang="en-US" sz="1100" dirty="0">
+                <a:solidFill>
+                  <a:srgbClr val="075985"/>
+                </a:solidFill>
+                <a:latin typeface="Calibri" pitchFamily="34" charset="0"/>
+                <a:ea typeface="Calibri" pitchFamily="34" charset="-122"/>
+                <a:cs typeface="Calibri" pitchFamily="34" charset="-120"/>
+              </a:rPr>
+              <a:t> · l'ordine little-endian</a:t>
+            </a:r>
+            <a:endParaRPr lang="en-US" sz="1100" dirty="0"/>
+          </a:p>
+        </p:txBody>
+      </p:sp>
+      <p:sp>
+        <p:nvSpPr>
           <p:cNvPr id="25" name="Slide Number Placeholder 0"/>
           <p:cNvSpPr>
             <a:spLocks noGrp="1"/>
@@ -9616,6 +10427,133 @@
       </p:sp>
       <p:sp>
         <p:nvSpPr>
+          <p:cNvPr id="27" name="Shape 25"/>
+          <p:cNvSpPr/>
+          <p:nvPr/>
+        </p:nvSpPr>
+        <p:spPr>
+          <a:xfrm>
+            <a:off x="8117281" y="91440"/>
+            <a:ext cx="3525774" cy="274320"/>
+          </a:xfrm>
+          <a:prstGeom prst="rect">
+            <a:avLst/>
+          </a:prstGeom>
+          <a:solidFill>
+            <a:srgbClr val="E0F2FE"/>
+          </a:solidFill>
+          <a:ln w="12700">
+            <a:solidFill>
+              <a:srgbClr val="0369A1"/>
+            </a:solidFill>
+            <a:prstDash val="solid"/>
+          </a:ln>
+        </p:spPr>
+      </p:sp>
+      <p:sp>
+        <p:nvSpPr>
+          <p:cNvPr id="28" name="Shape 26"/>
+          <p:cNvSpPr/>
+          <p:nvPr/>
+        </p:nvSpPr>
+        <p:spPr>
+          <a:xfrm>
+            <a:off x="8117281" y="91440"/>
+            <a:ext cx="73152" cy="274320"/>
+          </a:xfrm>
+          <a:prstGeom prst="rect">
+            <a:avLst/>
+          </a:prstGeom>
+          <a:solidFill>
+            <a:srgbClr val="0369A1"/>
+          </a:solidFill>
+          <a:ln w="12700">
+            <a:solidFill>
+              <a:srgbClr val="0369A1"/>
+            </a:solidFill>
+            <a:prstDash val="solid"/>
+          </a:ln>
+        </p:spPr>
+      </p:sp>
+      <p:pic>
+        <p:nvPicPr>
+          <p:cNvPr id="29" name="Image 0" descr="preencoded.png">    </p:cNvPr>
+          <p:cNvPicPr>
+            <a:picLocks noChangeAspect="1"/>
+          </p:cNvPicPr>
+          <p:nvPr/>
+        </p:nvPicPr>
+        <p:blipFill>
+          <a:blip r:embed="rId1"/>
+          <a:stretch>
+            <a:fillRect/>
+          </a:stretch>
+        </p:blipFill>
+        <p:spPr>
+          <a:xfrm>
+            <a:off x="8245297" y="128016"/>
+            <a:ext cx="201168" cy="201168"/>
+          </a:xfrm>
+          <a:prstGeom prst="rect">
+            <a:avLst/>
+          </a:prstGeom>
+        </p:spPr>
+      </p:pic>
+      <p:sp>
+        <p:nvSpPr>
+          <p:cNvPr id="30" name="Text 27"/>
+          <p:cNvSpPr txBox="1"/>
+          <p:nvPr/>
+        </p:nvSpPr>
+        <p:spPr>
+          <a:xfrm>
+            <a:off x="8501329" y="91440"/>
+            <a:ext cx="3105150" cy="274320"/>
+          </a:xfrm>
+          <a:prstGeom prst="rect">
+            <a:avLst/>
+          </a:prstGeom>
+          <a:noFill/>
+          <a:ln/>
+        </p:spPr>
+        <p:txBody>
+          <a:bodyPr wrap="square" lIns="0" tIns="0" rIns="0" bIns="0" rtlCol="0" anchor="ctr"/>
+          <a:lstStyle/>
+          <a:p>
+            <a:pPr indent="0" marL="0">
+              <a:buNone/>
+            </a:pPr>
+            <a:r>
+              <a:rPr lang="en-US" sz="1100" b="1" dirty="0">
+                <a:solidFill>
+                  <a:srgbClr val="075985"/>
+                </a:solidFill>
+                <a:latin typeface="Calibri" pitchFamily="34" charset="0"/>
+                <a:ea typeface="Calibri" pitchFamily="34" charset="-122"/>
+                <a:cs typeface="Calibri" pitchFamily="34" charset="-120"/>
+              </a:rPr>
+              <a:t>DA COMPRENDERE OGGI</a:t>
+            </a:r>
+            <a:pPr indent="0" marL="0">
+              <a:buNone/>
+            </a:pPr>
+            <a:r>
+              <a:rPr lang="en-US" sz="1100" dirty="0">
+                <a:solidFill>
+                  <a:srgbClr val="075985"/>
+                </a:solidFill>
+                <a:latin typeface="Calibri" pitchFamily="34" charset="0"/>
+                <a:ea typeface="Calibri" pitchFamily="34" charset="-122"/>
+                <a:cs typeface="Calibri" pitchFamily="34" charset="-120"/>
+              </a:rPr>
+              <a:t> · le strutture dati</a:t>
+            </a:r>
+            <a:endParaRPr lang="en-US" sz="1100" dirty="0"/>
+          </a:p>
+        </p:txBody>
+      </p:sp>
+      <p:sp>
+        <p:nvSpPr>
           <p:cNvPr id="25" name="Slide Number Placeholder 0"/>
           <p:cNvSpPr>
             <a:spLocks noGrp="1"/>
@@ -10143,6 +11081,133 @@
       </p:sp>
       <p:sp>
         <p:nvSpPr>
+          <p:cNvPr id="14" name="Shape 12"/>
+          <p:cNvSpPr/>
+          <p:nvPr/>
+        </p:nvSpPr>
+        <p:spPr>
+          <a:xfrm>
+            <a:off x="8379917" y="91440"/>
+            <a:ext cx="3263138" cy="274320"/>
+          </a:xfrm>
+          <a:prstGeom prst="rect">
+            <a:avLst/>
+          </a:prstGeom>
+          <a:solidFill>
+            <a:srgbClr val="E0F2FE"/>
+          </a:solidFill>
+          <a:ln w="12700">
+            <a:solidFill>
+              <a:srgbClr val="0369A1"/>
+            </a:solidFill>
+            <a:prstDash val="solid"/>
+          </a:ln>
+        </p:spPr>
+      </p:sp>
+      <p:sp>
+        <p:nvSpPr>
+          <p:cNvPr id="15" name="Shape 13"/>
+          <p:cNvSpPr/>
+          <p:nvPr/>
+        </p:nvSpPr>
+        <p:spPr>
+          <a:xfrm>
+            <a:off x="8379917" y="91440"/>
+            <a:ext cx="73152" cy="274320"/>
+          </a:xfrm>
+          <a:prstGeom prst="rect">
+            <a:avLst/>
+          </a:prstGeom>
+          <a:solidFill>
+            <a:srgbClr val="0369A1"/>
+          </a:solidFill>
+          <a:ln w="12700">
+            <a:solidFill>
+              <a:srgbClr val="0369A1"/>
+            </a:solidFill>
+            <a:prstDash val="solid"/>
+          </a:ln>
+        </p:spPr>
+      </p:sp>
+      <p:pic>
+        <p:nvPicPr>
+          <p:cNvPr id="16" name="Image 0" descr="preencoded.png">    </p:cNvPr>
+          <p:cNvPicPr>
+            <a:picLocks noChangeAspect="1"/>
+          </p:cNvPicPr>
+          <p:nvPr/>
+        </p:nvPicPr>
+        <p:blipFill>
+          <a:blip r:embed="rId1"/>
+          <a:stretch>
+            <a:fillRect/>
+          </a:stretch>
+        </p:blipFill>
+        <p:spPr>
+          <a:xfrm>
+            <a:off x="8507933" y="128016"/>
+            <a:ext cx="201168" cy="201168"/>
+          </a:xfrm>
+          <a:prstGeom prst="rect">
+            <a:avLst/>
+          </a:prstGeom>
+        </p:spPr>
+      </p:pic>
+      <p:sp>
+        <p:nvSpPr>
+          <p:cNvPr id="17" name="Text 14"/>
+          <p:cNvSpPr txBox="1"/>
+          <p:nvPr/>
+        </p:nvSpPr>
+        <p:spPr>
+          <a:xfrm>
+            <a:off x="8763965" y="91440"/>
+            <a:ext cx="2842514" cy="274320"/>
+          </a:xfrm>
+          <a:prstGeom prst="rect">
+            <a:avLst/>
+          </a:prstGeom>
+          <a:noFill/>
+          <a:ln/>
+        </p:spPr>
+        <p:txBody>
+          <a:bodyPr wrap="square" lIns="0" tIns="0" rIns="0" bIns="0" rtlCol="0" anchor="ctr"/>
+          <a:lstStyle/>
+          <a:p>
+            <a:pPr indent="0" marL="0">
+              <a:buNone/>
+            </a:pPr>
+            <a:r>
+              <a:rPr lang="en-US" sz="1100" b="1" dirty="0">
+                <a:solidFill>
+                  <a:srgbClr val="075985"/>
+                </a:solidFill>
+                <a:latin typeface="Calibri" pitchFamily="34" charset="0"/>
+                <a:ea typeface="Calibri" pitchFamily="34" charset="-122"/>
+                <a:cs typeface="Calibri" pitchFamily="34" charset="-120"/>
+              </a:rPr>
+              <a:t>DA COMPRENDERE OGGI</a:t>
+            </a:r>
+            <a:pPr indent="0" marL="0">
+              <a:buNone/>
+            </a:pPr>
+            <a:r>
+              <a:rPr lang="en-US" sz="1100" dirty="0">
+                <a:solidFill>
+                  <a:srgbClr val="075985"/>
+                </a:solidFill>
+                <a:latin typeface="Calibri" pitchFamily="34" charset="0"/>
+                <a:ea typeface="Calibri" pitchFamily="34" charset="-122"/>
+                <a:cs typeface="Calibri" pitchFamily="34" charset="-120"/>
+              </a:rPr>
+              <a:t> · gli algoritmi</a:t>
+            </a:r>
+            <a:endParaRPr lang="en-US" sz="1100" dirty="0"/>
+          </a:p>
+        </p:txBody>
+      </p:sp>
+      <p:sp>
+        <p:nvSpPr>
           <p:cNvPr id="25" name="Slide Number Placeholder 0"/>
           <p:cNvSpPr>
             <a:spLocks noGrp="1"/>
@@ -10612,6 +11677,133 @@
               <a:t>Esempio: un gioco che piazza il nemico con prg32_random_number</a:t>
             </a:r>
             <a:endParaRPr lang="en-US" sz="1900" dirty="0"/>
+          </a:p>
+        </p:txBody>
+      </p:sp>
+      <p:sp>
+        <p:nvSpPr>
+          <p:cNvPr id="9" name="Shape 7"/>
+          <p:cNvSpPr/>
+          <p:nvPr/>
+        </p:nvSpPr>
+        <p:spPr>
+          <a:xfrm>
+            <a:off x="8379917" y="91440"/>
+            <a:ext cx="3263138" cy="274320"/>
+          </a:xfrm>
+          <a:prstGeom prst="rect">
+            <a:avLst/>
+          </a:prstGeom>
+          <a:solidFill>
+            <a:srgbClr val="E0F2FE"/>
+          </a:solidFill>
+          <a:ln w="12700">
+            <a:solidFill>
+              <a:srgbClr val="0369A1"/>
+            </a:solidFill>
+            <a:prstDash val="solid"/>
+          </a:ln>
+        </p:spPr>
+      </p:sp>
+      <p:sp>
+        <p:nvSpPr>
+          <p:cNvPr id="10" name="Shape 8"/>
+          <p:cNvSpPr/>
+          <p:nvPr/>
+        </p:nvSpPr>
+        <p:spPr>
+          <a:xfrm>
+            <a:off x="8379917" y="91440"/>
+            <a:ext cx="73152" cy="274320"/>
+          </a:xfrm>
+          <a:prstGeom prst="rect">
+            <a:avLst/>
+          </a:prstGeom>
+          <a:solidFill>
+            <a:srgbClr val="0369A1"/>
+          </a:solidFill>
+          <a:ln w="12700">
+            <a:solidFill>
+              <a:srgbClr val="0369A1"/>
+            </a:solidFill>
+            <a:prstDash val="solid"/>
+          </a:ln>
+        </p:spPr>
+      </p:sp>
+      <p:pic>
+        <p:nvPicPr>
+          <p:cNvPr id="11" name="Image 0" descr="preencoded.png">    </p:cNvPr>
+          <p:cNvPicPr>
+            <a:picLocks noChangeAspect="1"/>
+          </p:cNvPicPr>
+          <p:nvPr/>
+        </p:nvPicPr>
+        <p:blipFill>
+          <a:blip r:embed="rId1"/>
+          <a:stretch>
+            <a:fillRect/>
+          </a:stretch>
+        </p:blipFill>
+        <p:spPr>
+          <a:xfrm>
+            <a:off x="8507933" y="128016"/>
+            <a:ext cx="201168" cy="201168"/>
+          </a:xfrm>
+          <a:prstGeom prst="rect">
+            <a:avLst/>
+          </a:prstGeom>
+        </p:spPr>
+      </p:pic>
+      <p:sp>
+        <p:nvSpPr>
+          <p:cNvPr id="12" name="Text 9"/>
+          <p:cNvSpPr txBox="1"/>
+          <p:nvPr/>
+        </p:nvSpPr>
+        <p:spPr>
+          <a:xfrm>
+            <a:off x="8763965" y="91440"/>
+            <a:ext cx="2842514" cy="274320"/>
+          </a:xfrm>
+          <a:prstGeom prst="rect">
+            <a:avLst/>
+          </a:prstGeom>
+          <a:noFill/>
+          <a:ln/>
+        </p:spPr>
+        <p:txBody>
+          <a:bodyPr wrap="square" lIns="0" tIns="0" rIns="0" bIns="0" rtlCol="0" anchor="ctr"/>
+          <a:lstStyle/>
+          <a:p>
+            <a:pPr indent="0" marL="0">
+              <a:buNone/>
+            </a:pPr>
+            <a:r>
+              <a:rPr lang="en-US" sz="1100" b="1" dirty="0">
+                <a:solidFill>
+                  <a:srgbClr val="075985"/>
+                </a:solidFill>
+                <a:latin typeface="Calibri" pitchFamily="34" charset="0"/>
+                <a:ea typeface="Calibri" pitchFamily="34" charset="-122"/>
+                <a:cs typeface="Calibri" pitchFamily="34" charset="-120"/>
+              </a:rPr>
+              <a:t>DA COMPRENDERE OGGI</a:t>
+            </a:r>
+            <a:pPr indent="0" marL="0">
+              <a:buNone/>
+            </a:pPr>
+            <a:r>
+              <a:rPr lang="en-US" sz="1100" dirty="0">
+                <a:solidFill>
+                  <a:srgbClr val="075985"/>
+                </a:solidFill>
+                <a:latin typeface="Calibri" pitchFamily="34" charset="0"/>
+                <a:ea typeface="Calibri" pitchFamily="34" charset="-122"/>
+                <a:cs typeface="Calibri" pitchFamily="34" charset="-120"/>
+              </a:rPr>
+              <a:t> · gli algoritmi</a:t>
+            </a:r>
+            <a:endParaRPr lang="en-US" sz="1100" dirty="0"/>
           </a:p>
         </p:txBody>
       </p:sp>
@@ -17346,9 +18538,59 @@
           </a:p>
         </p:txBody>
       </p:sp>
+      <p:sp>
+        <p:nvSpPr>
+          <p:cNvPr id="13" name="Shape 11"/>
+          <p:cNvSpPr/>
+          <p:nvPr/>
+        </p:nvSpPr>
+        <p:spPr>
+          <a:xfrm>
+            <a:off x="7920304" y="91440"/>
+            <a:ext cx="3722751" cy="274320"/>
+          </a:xfrm>
+          <a:prstGeom prst="rect">
+            <a:avLst/>
+          </a:prstGeom>
+          <a:solidFill>
+            <a:srgbClr val="E0F2FE"/>
+          </a:solidFill>
+          <a:ln w="12700">
+            <a:solidFill>
+              <a:srgbClr val="0369A1"/>
+            </a:solidFill>
+            <a:prstDash val="solid"/>
+          </a:ln>
+        </p:spPr>
+      </p:sp>
+      <p:sp>
+        <p:nvSpPr>
+          <p:cNvPr id="14" name="Shape 12"/>
+          <p:cNvSpPr/>
+          <p:nvPr/>
+        </p:nvSpPr>
+        <p:spPr>
+          <a:xfrm>
+            <a:off x="7920304" y="91440"/>
+            <a:ext cx="73152" cy="274320"/>
+          </a:xfrm>
+          <a:prstGeom prst="rect">
+            <a:avLst/>
+          </a:prstGeom>
+          <a:solidFill>
+            <a:srgbClr val="0369A1"/>
+          </a:solidFill>
+          <a:ln w="12700">
+            <a:solidFill>
+              <a:srgbClr val="0369A1"/>
+            </a:solidFill>
+            <a:prstDash val="solid"/>
+          </a:ln>
+        </p:spPr>
+      </p:sp>
       <p:pic>
         <p:nvPicPr>
-          <p:cNvPr id="14" name="Image 0" descr="preencoded.png">    </p:cNvPr>
+          <p:cNvPr id="15" name="Image 0" descr="preencoded.png">    </p:cNvPr>
           <p:cNvPicPr>
             <a:picLocks noChangeAspect="1"/>
           </p:cNvPicPr>
@@ -17356,6 +18598,83 @@
         </p:nvPicPr>
         <p:blipFill>
           <a:blip r:embed="rId1"/>
+          <a:stretch>
+            <a:fillRect/>
+          </a:stretch>
+        </p:blipFill>
+        <p:spPr>
+          <a:xfrm>
+            <a:off x="8048320" y="128016"/>
+            <a:ext cx="201168" cy="201168"/>
+          </a:xfrm>
+          <a:prstGeom prst="rect">
+            <a:avLst/>
+          </a:prstGeom>
+        </p:spPr>
+      </p:pic>
+      <p:sp>
+        <p:nvSpPr>
+          <p:cNvPr id="16" name="Text 13"/>
+          <p:cNvSpPr txBox="1"/>
+          <p:nvPr/>
+        </p:nvSpPr>
+        <p:spPr>
+          <a:xfrm>
+            <a:off x="8304352" y="91440"/>
+            <a:ext cx="3302127" cy="274320"/>
+          </a:xfrm>
+          <a:prstGeom prst="rect">
+            <a:avLst/>
+          </a:prstGeom>
+          <a:noFill/>
+          <a:ln/>
+        </p:spPr>
+        <p:txBody>
+          <a:bodyPr wrap="square" lIns="0" tIns="0" rIns="0" bIns="0" rtlCol="0" anchor="ctr"/>
+          <a:lstStyle/>
+          <a:p>
+            <a:pPr indent="0" marL="0">
+              <a:buNone/>
+            </a:pPr>
+            <a:r>
+              <a:rPr lang="en-US" sz="1100" b="1" dirty="0">
+                <a:solidFill>
+                  <a:srgbClr val="075985"/>
+                </a:solidFill>
+                <a:latin typeface="Calibri" pitchFamily="34" charset="0"/>
+                <a:ea typeface="Calibri" pitchFamily="34" charset="-122"/>
+                <a:cs typeface="Calibri" pitchFamily="34" charset="-120"/>
+              </a:rPr>
+              <a:t>DA COMPRENDERE OGGI</a:t>
+            </a:r>
+            <a:pPr indent="0" marL="0">
+              <a:buNone/>
+            </a:pPr>
+            <a:r>
+              <a:rPr lang="en-US" sz="1100" dirty="0">
+                <a:solidFill>
+                  <a:srgbClr val="075985"/>
+                </a:solidFill>
+                <a:latin typeface="Calibri" pitchFamily="34" charset="0"/>
+                <a:ea typeface="Calibri" pitchFamily="34" charset="-122"/>
+                <a:cs typeface="Calibri" pitchFamily="34" charset="-120"/>
+              </a:rPr>
+              <a:t> · analogico e digitale</a:t>
+            </a:r>
+            <a:endParaRPr lang="en-US" sz="1100" dirty="0"/>
+          </a:p>
+        </p:txBody>
+      </p:sp>
+      <p:pic>
+        <p:nvPicPr>
+          <p:cNvPr id="18" name="Image 1" descr="preencoded.png">    </p:cNvPr>
+          <p:cNvPicPr>
+            <a:picLocks noChangeAspect="1"/>
+          </p:cNvPicPr>
+          <p:nvPr/>
+        </p:nvPicPr>
+        <p:blipFill>
+          <a:blip r:embed="rId2"/>
           <a:stretch>
             <a:fillRect/>
           </a:stretch>
@@ -19470,6 +20789,133 @@
               <a:t>n bit danno 2^n configurazioni. Il significato di una configurazione è una convenzione, non una proprietà dei bit.</a:t>
             </a:r>
             <a:endParaRPr lang="en-US" sz="1500" dirty="0"/>
+          </a:p>
+        </p:txBody>
+      </p:sp>
+      <p:sp>
+        <p:nvSpPr>
+          <p:cNvPr id="5" name="Shape 2"/>
+          <p:cNvSpPr/>
+          <p:nvPr/>
+        </p:nvSpPr>
+        <p:spPr>
+          <a:xfrm>
+            <a:off x="8117281" y="91440"/>
+            <a:ext cx="3525774" cy="274320"/>
+          </a:xfrm>
+          <a:prstGeom prst="rect">
+            <a:avLst/>
+          </a:prstGeom>
+          <a:solidFill>
+            <a:srgbClr val="E0F2FE"/>
+          </a:solidFill>
+          <a:ln w="12700">
+            <a:solidFill>
+              <a:srgbClr val="0369A1"/>
+            </a:solidFill>
+            <a:prstDash val="solid"/>
+          </a:ln>
+        </p:spPr>
+      </p:sp>
+      <p:sp>
+        <p:nvSpPr>
+          <p:cNvPr id="6" name="Shape 3"/>
+          <p:cNvSpPr/>
+          <p:nvPr/>
+        </p:nvSpPr>
+        <p:spPr>
+          <a:xfrm>
+            <a:off x="8117281" y="91440"/>
+            <a:ext cx="73152" cy="274320"/>
+          </a:xfrm>
+          <a:prstGeom prst="rect">
+            <a:avLst/>
+          </a:prstGeom>
+          <a:solidFill>
+            <a:srgbClr val="0369A1"/>
+          </a:solidFill>
+          <a:ln w="12700">
+            <a:solidFill>
+              <a:srgbClr val="0369A1"/>
+            </a:solidFill>
+            <a:prstDash val="solid"/>
+          </a:ln>
+        </p:spPr>
+      </p:sp>
+      <p:pic>
+        <p:nvPicPr>
+          <p:cNvPr id="7" name="Image 0" descr="preencoded.png">    </p:cNvPr>
+          <p:cNvPicPr>
+            <a:picLocks noChangeAspect="1"/>
+          </p:cNvPicPr>
+          <p:nvPr/>
+        </p:nvPicPr>
+        <p:blipFill>
+          <a:blip r:embed="rId1"/>
+          <a:stretch>
+            <a:fillRect/>
+          </a:stretch>
+        </p:blipFill>
+        <p:spPr>
+          <a:xfrm>
+            <a:off x="8245297" y="128016"/>
+            <a:ext cx="201168" cy="201168"/>
+          </a:xfrm>
+          <a:prstGeom prst="rect">
+            <a:avLst/>
+          </a:prstGeom>
+        </p:spPr>
+      </p:pic>
+      <p:sp>
+        <p:nvSpPr>
+          <p:cNvPr id="8" name="Text 4"/>
+          <p:cNvSpPr txBox="1"/>
+          <p:nvPr/>
+        </p:nvSpPr>
+        <p:spPr>
+          <a:xfrm>
+            <a:off x="8501329" y="91440"/>
+            <a:ext cx="3105150" cy="274320"/>
+          </a:xfrm>
+          <a:prstGeom prst="rect">
+            <a:avLst/>
+          </a:prstGeom>
+          <a:noFill/>
+          <a:ln/>
+        </p:spPr>
+        <p:txBody>
+          <a:bodyPr wrap="square" lIns="0" tIns="0" rIns="0" bIns="0" rtlCol="0" anchor="ctr"/>
+          <a:lstStyle/>
+          <a:p>
+            <a:pPr indent="0" marL="0">
+              <a:buNone/>
+            </a:pPr>
+            <a:r>
+              <a:rPr lang="en-US" sz="1100" b="1" dirty="0">
+                <a:solidFill>
+                  <a:srgbClr val="075985"/>
+                </a:solidFill>
+                <a:latin typeface="Calibri" pitchFamily="34" charset="0"/>
+                <a:ea typeface="Calibri" pitchFamily="34" charset="-122"/>
+                <a:cs typeface="Calibri" pitchFamily="34" charset="-120"/>
+              </a:rPr>
+              <a:t>DA COMPRENDERE OGGI</a:t>
+            </a:r>
+            <a:pPr indent="0" marL="0">
+              <a:buNone/>
+            </a:pPr>
+            <a:r>
+              <a:rPr lang="en-US" sz="1100" dirty="0">
+                <a:solidFill>
+                  <a:srgbClr val="075985"/>
+                </a:solidFill>
+                <a:latin typeface="Calibri" pitchFamily="34" charset="0"/>
+                <a:ea typeface="Calibri" pitchFamily="34" charset="-122"/>
+                <a:cs typeface="Calibri" pitchFamily="34" charset="-120"/>
+              </a:rPr>
+              <a:t> · bit, byte, parola</a:t>
+            </a:r>
+            <a:endParaRPr lang="en-US" sz="1100" dirty="0"/>
           </a:p>
         </p:txBody>
       </p:sp>
@@ -23313,6 +24759,133 @@
       </p:graphicFrame>
       <p:sp>
         <p:nvSpPr>
+          <p:cNvPr id="4" name="Shape 1"/>
+          <p:cNvSpPr/>
+          <p:nvPr/>
+        </p:nvSpPr>
+        <p:spPr>
+          <a:xfrm>
+            <a:off x="8379917" y="91440"/>
+            <a:ext cx="3263138" cy="274320"/>
+          </a:xfrm>
+          <a:prstGeom prst="rect">
+            <a:avLst/>
+          </a:prstGeom>
+          <a:solidFill>
+            <a:srgbClr val="E0F2FE"/>
+          </a:solidFill>
+          <a:ln w="12700">
+            <a:solidFill>
+              <a:srgbClr val="0369A1"/>
+            </a:solidFill>
+            <a:prstDash val="solid"/>
+          </a:ln>
+        </p:spPr>
+      </p:sp>
+      <p:sp>
+        <p:nvSpPr>
+          <p:cNvPr id="5" name="Shape 2"/>
+          <p:cNvSpPr/>
+          <p:nvPr/>
+        </p:nvSpPr>
+        <p:spPr>
+          <a:xfrm>
+            <a:off x="8379917" y="91440"/>
+            <a:ext cx="73152" cy="274320"/>
+          </a:xfrm>
+          <a:prstGeom prst="rect">
+            <a:avLst/>
+          </a:prstGeom>
+          <a:solidFill>
+            <a:srgbClr val="0369A1"/>
+          </a:solidFill>
+          <a:ln w="12700">
+            <a:solidFill>
+              <a:srgbClr val="0369A1"/>
+            </a:solidFill>
+            <a:prstDash val="solid"/>
+          </a:ln>
+        </p:spPr>
+      </p:sp>
+      <p:pic>
+        <p:nvPicPr>
+          <p:cNvPr id="6" name="Image 0" descr="preencoded.png">    </p:cNvPr>
+          <p:cNvPicPr>
+            <a:picLocks noChangeAspect="1"/>
+          </p:cNvPicPr>
+          <p:nvPr/>
+        </p:nvPicPr>
+        <p:blipFill>
+          <a:blip r:embed="rId1"/>
+          <a:stretch>
+            <a:fillRect/>
+          </a:stretch>
+        </p:blipFill>
+        <p:spPr>
+          <a:xfrm>
+            <a:off x="8507933" y="128016"/>
+            <a:ext cx="201168" cy="201168"/>
+          </a:xfrm>
+          <a:prstGeom prst="rect">
+            <a:avLst/>
+          </a:prstGeom>
+        </p:spPr>
+      </p:pic>
+      <p:sp>
+        <p:nvSpPr>
+          <p:cNvPr id="7" name="Text 3"/>
+          <p:cNvSpPr txBox="1"/>
+          <p:nvPr/>
+        </p:nvSpPr>
+        <p:spPr>
+          <a:xfrm>
+            <a:off x="8763965" y="91440"/>
+            <a:ext cx="2842514" cy="274320"/>
+          </a:xfrm>
+          <a:prstGeom prst="rect">
+            <a:avLst/>
+          </a:prstGeom>
+          <a:noFill/>
+          <a:ln/>
+        </p:spPr>
+        <p:txBody>
+          <a:bodyPr wrap="square" lIns="0" tIns="0" rIns="0" bIns="0" rtlCol="0" anchor="ctr"/>
+          <a:lstStyle/>
+          <a:p>
+            <a:pPr indent="0" marL="0">
+              <a:buNone/>
+            </a:pPr>
+            <a:r>
+              <a:rPr lang="en-US" sz="1100" b="1" dirty="0">
+                <a:solidFill>
+                  <a:srgbClr val="075985"/>
+                </a:solidFill>
+                <a:latin typeface="Calibri" pitchFamily="34" charset="0"/>
+                <a:ea typeface="Calibri" pitchFamily="34" charset="-122"/>
+                <a:cs typeface="Calibri" pitchFamily="34" charset="-120"/>
+              </a:rPr>
+              <a:t>DA COMPRENDERE OGGI</a:t>
+            </a:r>
+            <a:pPr indent="0" marL="0">
+              <a:buNone/>
+            </a:pPr>
+            <a:r>
+              <a:rPr lang="en-US" sz="1100" dirty="0">
+                <a:solidFill>
+                  <a:srgbClr val="075985"/>
+                </a:solidFill>
+                <a:latin typeface="Calibri" pitchFamily="34" charset="0"/>
+                <a:ea typeface="Calibri" pitchFamily="34" charset="-122"/>
+                <a:cs typeface="Calibri" pitchFamily="34" charset="-120"/>
+              </a:rPr>
+              <a:t> · l'esadecimale</a:t>
+            </a:r>
+            <a:endParaRPr lang="en-US" sz="1100" dirty="0"/>
+          </a:p>
+        </p:txBody>
+      </p:sp>
+      <p:sp>
+        <p:nvSpPr>
           <p:cNvPr id="25" name="Slide Number Placeholder 0"/>
           <p:cNvSpPr>
             <a:spLocks noGrp="1"/>
@@ -24594,6 +26167,133 @@
       </p:sp>
       <p:sp>
         <p:nvSpPr>
+          <p:cNvPr id="32" name="Shape 30"/>
+          <p:cNvSpPr/>
+          <p:nvPr/>
+        </p:nvSpPr>
+        <p:spPr>
+          <a:xfrm>
+            <a:off x="7657668" y="91440"/>
+            <a:ext cx="3985387" cy="274320"/>
+          </a:xfrm>
+          <a:prstGeom prst="rect">
+            <a:avLst/>
+          </a:prstGeom>
+          <a:solidFill>
+            <a:srgbClr val="E0F2FE"/>
+          </a:solidFill>
+          <a:ln w="12700">
+            <a:solidFill>
+              <a:srgbClr val="0369A1"/>
+            </a:solidFill>
+            <a:prstDash val="solid"/>
+          </a:ln>
+        </p:spPr>
+      </p:sp>
+      <p:sp>
+        <p:nvSpPr>
+          <p:cNvPr id="33" name="Shape 31"/>
+          <p:cNvSpPr/>
+          <p:nvPr/>
+        </p:nvSpPr>
+        <p:spPr>
+          <a:xfrm>
+            <a:off x="7657668" y="91440"/>
+            <a:ext cx="73152" cy="274320"/>
+          </a:xfrm>
+          <a:prstGeom prst="rect">
+            <a:avLst/>
+          </a:prstGeom>
+          <a:solidFill>
+            <a:srgbClr val="0369A1"/>
+          </a:solidFill>
+          <a:ln w="12700">
+            <a:solidFill>
+              <a:srgbClr val="0369A1"/>
+            </a:solidFill>
+            <a:prstDash val="solid"/>
+          </a:ln>
+        </p:spPr>
+      </p:sp>
+      <p:pic>
+        <p:nvPicPr>
+          <p:cNvPr id="34" name="Image 0" descr="preencoded.png">    </p:cNvPr>
+          <p:cNvPicPr>
+            <a:picLocks noChangeAspect="1"/>
+          </p:cNvPicPr>
+          <p:nvPr/>
+        </p:nvPicPr>
+        <p:blipFill>
+          <a:blip r:embed="rId1"/>
+          <a:stretch>
+            <a:fillRect/>
+          </a:stretch>
+        </p:blipFill>
+        <p:spPr>
+          <a:xfrm>
+            <a:off x="7785684" y="128016"/>
+            <a:ext cx="201168" cy="201168"/>
+          </a:xfrm>
+          <a:prstGeom prst="rect">
+            <a:avLst/>
+          </a:prstGeom>
+        </p:spPr>
+      </p:pic>
+      <p:sp>
+        <p:nvSpPr>
+          <p:cNvPr id="35" name="Text 32"/>
+          <p:cNvSpPr txBox="1"/>
+          <p:nvPr/>
+        </p:nvSpPr>
+        <p:spPr>
+          <a:xfrm>
+            <a:off x="8041716" y="91440"/>
+            <a:ext cx="3564763" cy="274320"/>
+          </a:xfrm>
+          <a:prstGeom prst="rect">
+            <a:avLst/>
+          </a:prstGeom>
+          <a:noFill/>
+          <a:ln/>
+        </p:spPr>
+        <p:txBody>
+          <a:bodyPr wrap="square" lIns="0" tIns="0" rIns="0" bIns="0" rtlCol="0" anchor="ctr"/>
+          <a:lstStyle/>
+          <a:p>
+            <a:pPr indent="0" marL="0">
+              <a:buNone/>
+            </a:pPr>
+            <a:r>
+              <a:rPr lang="en-US" sz="1100" b="1" dirty="0">
+                <a:solidFill>
+                  <a:srgbClr val="075985"/>
+                </a:solidFill>
+                <a:latin typeface="Calibri" pitchFamily="34" charset="0"/>
+                <a:ea typeface="Calibri" pitchFamily="34" charset="-122"/>
+                <a:cs typeface="Calibri" pitchFamily="34" charset="-120"/>
+              </a:rPr>
+              <a:t>DA COMPRENDERE OGGI</a:t>
+            </a:r>
+            <a:pPr indent="0" marL="0">
+              <a:buNone/>
+            </a:pPr>
+            <a:r>
+              <a:rPr lang="en-US" sz="1100" dirty="0">
+                <a:solidFill>
+                  <a:srgbClr val="075985"/>
+                </a:solidFill>
+                <a:latin typeface="Calibri" pitchFamily="34" charset="0"/>
+                <a:ea typeface="Calibri" pitchFamily="34" charset="-122"/>
+                <a:cs typeface="Calibri" pitchFamily="34" charset="-120"/>
+              </a:rPr>
+              <a:t> · la notazione posizionale</a:t>
+            </a:r>
+            <a:endParaRPr lang="en-US" sz="1100" dirty="0"/>
+          </a:p>
+        </p:txBody>
+      </p:sp>
+      <p:sp>
+        <p:nvSpPr>
           <p:cNvPr id="25" name="Slide Number Placeholder 0"/>
           <p:cNvSpPr>
             <a:spLocks noGrp="1"/>
@@ -25482,6 +27182,133 @@
       </p:sp>
       <p:sp>
         <p:nvSpPr>
+          <p:cNvPr id="24" name="Shape 22"/>
+          <p:cNvSpPr/>
+          <p:nvPr/>
+        </p:nvSpPr>
+        <p:spPr>
+          <a:xfrm>
+            <a:off x="8379917" y="91440"/>
+            <a:ext cx="3263138" cy="274320"/>
+          </a:xfrm>
+          <a:prstGeom prst="rect">
+            <a:avLst/>
+          </a:prstGeom>
+          <a:solidFill>
+            <a:srgbClr val="E0F2FE"/>
+          </a:solidFill>
+          <a:ln w="12700">
+            <a:solidFill>
+              <a:srgbClr val="0369A1"/>
+            </a:solidFill>
+            <a:prstDash val="solid"/>
+          </a:ln>
+        </p:spPr>
+      </p:sp>
+      <p:sp>
+        <p:nvSpPr>
+          <p:cNvPr id="25" name="Shape 23"/>
+          <p:cNvSpPr/>
+          <p:nvPr/>
+        </p:nvSpPr>
+        <p:spPr>
+          <a:xfrm>
+            <a:off x="8379917" y="91440"/>
+            <a:ext cx="73152" cy="274320"/>
+          </a:xfrm>
+          <a:prstGeom prst="rect">
+            <a:avLst/>
+          </a:prstGeom>
+          <a:solidFill>
+            <a:srgbClr val="0369A1"/>
+          </a:solidFill>
+          <a:ln w="12700">
+            <a:solidFill>
+              <a:srgbClr val="0369A1"/>
+            </a:solidFill>
+            <a:prstDash val="solid"/>
+          </a:ln>
+        </p:spPr>
+      </p:sp>
+      <p:pic>
+        <p:nvPicPr>
+          <p:cNvPr id="26" name="Image 0" descr="preencoded.png">    </p:cNvPr>
+          <p:cNvPicPr>
+            <a:picLocks noChangeAspect="1"/>
+          </p:cNvPicPr>
+          <p:nvPr/>
+        </p:nvPicPr>
+        <p:blipFill>
+          <a:blip r:embed="rId1"/>
+          <a:stretch>
+            <a:fillRect/>
+          </a:stretch>
+        </p:blipFill>
+        <p:spPr>
+          <a:xfrm>
+            <a:off x="8507933" y="128016"/>
+            <a:ext cx="201168" cy="201168"/>
+          </a:xfrm>
+          <a:prstGeom prst="rect">
+            <a:avLst/>
+          </a:prstGeom>
+        </p:spPr>
+      </p:pic>
+      <p:sp>
+        <p:nvSpPr>
+          <p:cNvPr id="27" name="Text 24"/>
+          <p:cNvSpPr txBox="1"/>
+          <p:nvPr/>
+        </p:nvSpPr>
+        <p:spPr>
+          <a:xfrm>
+            <a:off x="8763965" y="91440"/>
+            <a:ext cx="2842514" cy="274320"/>
+          </a:xfrm>
+          <a:prstGeom prst="rect">
+            <a:avLst/>
+          </a:prstGeom>
+          <a:noFill/>
+          <a:ln/>
+        </p:spPr>
+        <p:txBody>
+          <a:bodyPr wrap="square" lIns="0" tIns="0" rIns="0" bIns="0" rtlCol="0" anchor="ctr"/>
+          <a:lstStyle/>
+          <a:p>
+            <a:pPr indent="0" marL="0">
+              <a:buNone/>
+            </a:pPr>
+            <a:r>
+              <a:rPr lang="en-US" sz="1100" b="1" dirty="0">
+                <a:solidFill>
+                  <a:srgbClr val="075985"/>
+                </a:solidFill>
+                <a:latin typeface="Calibri" pitchFamily="34" charset="0"/>
+                <a:ea typeface="Calibri" pitchFamily="34" charset="-122"/>
+                <a:cs typeface="Calibri" pitchFamily="34" charset="-120"/>
+              </a:rPr>
+              <a:t>DA COMPRENDERE OGGI</a:t>
+            </a:r>
+            <a:pPr indent="0" marL="0">
+              <a:buNone/>
+            </a:pPr>
+            <a:r>
+              <a:rPr lang="en-US" sz="1100" dirty="0">
+                <a:solidFill>
+                  <a:srgbClr val="075985"/>
+                </a:solidFill>
+                <a:latin typeface="Calibri" pitchFamily="34" charset="0"/>
+                <a:ea typeface="Calibri" pitchFamily="34" charset="-122"/>
+                <a:cs typeface="Calibri" pitchFamily="34" charset="-120"/>
+              </a:rPr>
+              <a:t> · l'esadecimale</a:t>
+            </a:r>
+            <a:endParaRPr lang="en-US" sz="1100" dirty="0"/>
+          </a:p>
+        </p:txBody>
+      </p:sp>
+      <p:sp>
+        <p:nvSpPr>
           <p:cNvPr id="25" name="Slide Number Placeholder 0"/>
           <p:cNvSpPr>
             <a:spLocks noGrp="1"/>
@@ -27030,6 +28857,133 @@
               <a:t>Sedici bit, tre campi. Gli stessi sedici bit potrebbero essere un numero, due caratteri o mezza istruzione: il significato sta in come il programma li usa.</a:t>
             </a:r>
             <a:endParaRPr lang="en-US" sz="1600" dirty="0"/>
+          </a:p>
+        </p:txBody>
+      </p:sp>
+      <p:sp>
+        <p:nvSpPr>
+          <p:cNvPr id="41" name="Shape 39"/>
+          <p:cNvSpPr/>
+          <p:nvPr/>
+        </p:nvSpPr>
+        <p:spPr>
+          <a:xfrm>
+            <a:off x="7854645" y="91440"/>
+            <a:ext cx="3788410" cy="274320"/>
+          </a:xfrm>
+          <a:prstGeom prst="rect">
+            <a:avLst/>
+          </a:prstGeom>
+          <a:solidFill>
+            <a:srgbClr val="E0F2FE"/>
+          </a:solidFill>
+          <a:ln w="12700">
+            <a:solidFill>
+              <a:srgbClr val="0369A1"/>
+            </a:solidFill>
+            <a:prstDash val="solid"/>
+          </a:ln>
+        </p:spPr>
+      </p:sp>
+      <p:sp>
+        <p:nvSpPr>
+          <p:cNvPr id="42" name="Shape 40"/>
+          <p:cNvSpPr/>
+          <p:nvPr/>
+        </p:nvSpPr>
+        <p:spPr>
+          <a:xfrm>
+            <a:off x="7854645" y="91440"/>
+            <a:ext cx="73152" cy="274320"/>
+          </a:xfrm>
+          <a:prstGeom prst="rect">
+            <a:avLst/>
+          </a:prstGeom>
+          <a:solidFill>
+            <a:srgbClr val="0369A1"/>
+          </a:solidFill>
+          <a:ln w="12700">
+            <a:solidFill>
+              <a:srgbClr val="0369A1"/>
+            </a:solidFill>
+            <a:prstDash val="solid"/>
+          </a:ln>
+        </p:spPr>
+      </p:sp>
+      <p:pic>
+        <p:nvPicPr>
+          <p:cNvPr id="43" name="Image 0" descr="preencoded.png">    </p:cNvPr>
+          <p:cNvPicPr>
+            <a:picLocks noChangeAspect="1"/>
+          </p:cNvPicPr>
+          <p:nvPr/>
+        </p:nvPicPr>
+        <p:blipFill>
+          <a:blip r:embed="rId1"/>
+          <a:stretch>
+            <a:fillRect/>
+          </a:stretch>
+        </p:blipFill>
+        <p:spPr>
+          <a:xfrm>
+            <a:off x="7982661" y="128016"/>
+            <a:ext cx="201168" cy="201168"/>
+          </a:xfrm>
+          <a:prstGeom prst="rect">
+            <a:avLst/>
+          </a:prstGeom>
+        </p:spPr>
+      </p:pic>
+      <p:sp>
+        <p:nvSpPr>
+          <p:cNvPr id="44" name="Text 41"/>
+          <p:cNvSpPr txBox="1"/>
+          <p:nvPr/>
+        </p:nvSpPr>
+        <p:spPr>
+          <a:xfrm>
+            <a:off x="8238693" y="91440"/>
+            <a:ext cx="3367786" cy="274320"/>
+          </a:xfrm>
+          <a:prstGeom prst="rect">
+            <a:avLst/>
+          </a:prstGeom>
+          <a:noFill/>
+          <a:ln/>
+        </p:spPr>
+        <p:txBody>
+          <a:bodyPr wrap="square" lIns="0" tIns="0" rIns="0" bIns="0" rtlCol="0" anchor="ctr"/>
+          <a:lstStyle/>
+          <a:p>
+            <a:pPr indent="0" marL="0">
+              <a:buNone/>
+            </a:pPr>
+            <a:r>
+              <a:rPr lang="en-US" sz="1100" b="1" dirty="0">
+                <a:solidFill>
+                  <a:srgbClr val="075985"/>
+                </a:solidFill>
+                <a:latin typeface="Calibri" pitchFamily="34" charset="0"/>
+                <a:ea typeface="Calibri" pitchFamily="34" charset="-122"/>
+                <a:cs typeface="Calibri" pitchFamily="34" charset="-120"/>
+              </a:rPr>
+              <a:t>DA COMPRENDERE OGGI</a:t>
+            </a:r>
+            <a:pPr indent="0" marL="0">
+              <a:buNone/>
+            </a:pPr>
+            <a:r>
+              <a:rPr lang="en-US" sz="1100" dirty="0">
+                <a:solidFill>
+                  <a:srgbClr val="075985"/>
+                </a:solidFill>
+                <a:latin typeface="Calibri" pitchFamily="34" charset="0"/>
+                <a:ea typeface="Calibri" pitchFamily="34" charset="-122"/>
+                <a:cs typeface="Calibri" pitchFamily="34" charset="-120"/>
+              </a:rPr>
+              <a:t> · un colore è un numero</a:t>
+            </a:r>
+            <a:endParaRPr lang="en-US" sz="1100" dirty="0"/>
           </a:p>
         </p:txBody>
       </p:sp>
@@ -29574,6 +31528,133 @@
           </a:graphicData>
         </a:graphic>
       </p:graphicFrame>
+      <p:sp>
+        <p:nvSpPr>
+          <p:cNvPr id="4" name="Shape 1"/>
+          <p:cNvSpPr/>
+          <p:nvPr/>
+        </p:nvSpPr>
+        <p:spPr>
+          <a:xfrm>
+            <a:off x="7920304" y="91440"/>
+            <a:ext cx="3722751" cy="274320"/>
+          </a:xfrm>
+          <a:prstGeom prst="rect">
+            <a:avLst/>
+          </a:prstGeom>
+          <a:solidFill>
+            <a:srgbClr val="E0F2FE"/>
+          </a:solidFill>
+          <a:ln w="12700">
+            <a:solidFill>
+              <a:srgbClr val="0369A1"/>
+            </a:solidFill>
+            <a:prstDash val="solid"/>
+          </a:ln>
+        </p:spPr>
+      </p:sp>
+      <p:sp>
+        <p:nvSpPr>
+          <p:cNvPr id="5" name="Shape 2"/>
+          <p:cNvSpPr/>
+          <p:nvPr/>
+        </p:nvSpPr>
+        <p:spPr>
+          <a:xfrm>
+            <a:off x="7920304" y="91440"/>
+            <a:ext cx="73152" cy="274320"/>
+          </a:xfrm>
+          <a:prstGeom prst="rect">
+            <a:avLst/>
+          </a:prstGeom>
+          <a:solidFill>
+            <a:srgbClr val="0369A1"/>
+          </a:solidFill>
+          <a:ln w="12700">
+            <a:solidFill>
+              <a:srgbClr val="0369A1"/>
+            </a:solidFill>
+            <a:prstDash val="solid"/>
+          </a:ln>
+        </p:spPr>
+      </p:sp>
+      <p:pic>
+        <p:nvPicPr>
+          <p:cNvPr id="6" name="Image 0" descr="preencoded.png">    </p:cNvPr>
+          <p:cNvPicPr>
+            <a:picLocks noChangeAspect="1"/>
+          </p:cNvPicPr>
+          <p:nvPr/>
+        </p:nvPicPr>
+        <p:blipFill>
+          <a:blip r:embed="rId1"/>
+          <a:stretch>
+            <a:fillRect/>
+          </a:stretch>
+        </p:blipFill>
+        <p:spPr>
+          <a:xfrm>
+            <a:off x="8048320" y="128016"/>
+            <a:ext cx="201168" cy="201168"/>
+          </a:xfrm>
+          <a:prstGeom prst="rect">
+            <a:avLst/>
+          </a:prstGeom>
+        </p:spPr>
+      </p:pic>
+      <p:sp>
+        <p:nvSpPr>
+          <p:cNvPr id="7" name="Text 3"/>
+          <p:cNvSpPr txBox="1"/>
+          <p:nvPr/>
+        </p:nvSpPr>
+        <p:spPr>
+          <a:xfrm>
+            <a:off x="8304352" y="91440"/>
+            <a:ext cx="3302127" cy="274320"/>
+          </a:xfrm>
+          <a:prstGeom prst="rect">
+            <a:avLst/>
+          </a:prstGeom>
+          <a:noFill/>
+          <a:ln/>
+        </p:spPr>
+        <p:txBody>
+          <a:bodyPr wrap="square" lIns="0" tIns="0" rIns="0" bIns="0" rtlCol="0" anchor="ctr"/>
+          <a:lstStyle/>
+          <a:p>
+            <a:pPr indent="0" marL="0">
+              <a:buNone/>
+            </a:pPr>
+            <a:r>
+              <a:rPr lang="en-US" sz="1100" b="1" dirty="0">
+                <a:solidFill>
+                  <a:srgbClr val="075985"/>
+                </a:solidFill>
+                <a:latin typeface="Calibri" pitchFamily="34" charset="0"/>
+                <a:ea typeface="Calibri" pitchFamily="34" charset="-122"/>
+                <a:cs typeface="Calibri" pitchFamily="34" charset="-120"/>
+              </a:rPr>
+              <a:t>DA COMPRENDERE OGGI</a:t>
+            </a:r>
+            <a:pPr indent="0" marL="0">
+              <a:buNone/>
+            </a:pPr>
+            <a:r>
+              <a:rPr lang="en-US" sz="1100" dirty="0">
+                <a:solidFill>
+                  <a:srgbClr val="075985"/>
+                </a:solidFill>
+                <a:latin typeface="Calibri" pitchFamily="34" charset="0"/>
+                <a:ea typeface="Calibri" pitchFamily="34" charset="-122"/>
+                <a:cs typeface="Calibri" pitchFamily="34" charset="-120"/>
+              </a:rPr>
+              <a:t> · caratteri e stringhe</a:t>
+            </a:r>
+            <a:endParaRPr lang="en-US" sz="1100" dirty="0"/>
+          </a:p>
+        </p:txBody>
+      </p:sp>
       <p:sp>
         <p:nvSpPr>
           <p:cNvPr id="25" name="Slide Number Placeholder 0"/>

--- a/it/slides/04-Architettura_dei_Calcolatori-Informazione_Digitale.pptx
+++ b/it/slides/04-Architettura_dei_Calcolatori-Informazione_Digitale.pptx
@@ -126,13 +126,13 @@
   <p:extLst>
     <p:ext uri="{521415D9-36F7-43E2-AB2F-B90AF26B5E84}">
       <p14:sectionLst xmlns:p14="http://schemas.microsoft.com/office/powerpoint/2010/main">
-        <p14:section name="Apertura" id="{3eea4372-7909-1902-15bd-eb0b9d451d95}">
+        <p14:section name="Apertura" id="{3cf9070d-9d3c-5473-2962-8738f44fe523}">
           <p14:sldIdLst>
             <p14:sldId id="256"/>
             <p14:sldId id="257"/>
           </p14:sldIdLst>
         </p14:section>
-        <p14:section name="Informazione" id="{b0cf88dd-6dbb-59d1-32a4-4eb7000dfda1}">
+        <p14:section name="Informazione" id="{e12a64cb-2e7f-5ead-da03-d0e2c18c13a1}">
           <p14:sldIdLst>
             <p14:sldId id="258"/>
             <p14:sldId id="259"/>
@@ -142,7 +142,7 @@
             <p14:sldId id="263"/>
           </p14:sldIdLst>
         </p14:section>
-        <p14:section name="Testo" id="{366d337a-a36a-4635-7c9a-441d6ff708b4}">
+        <p14:section name="Testo" id="{e3a20d36-5b37-741b-43e1-e7e6e9adbdc9}">
           <p14:sldIdLst>
             <p14:sldId id="264"/>
             <p14:sldId id="265"/>
@@ -150,12 +150,12 @@
             <p14:sldId id="267"/>
           </p14:sldIdLst>
         </p14:section>
-        <p14:section name="Strutture dati" id="{925f74ec-a307-dca8-d541-07afa5674cee}">
+        <p14:section name="Strutture dati" id="{f914c46d-bb3c-d893-abd1-a87c65396655}">
           <p14:sldIdLst>
             <p14:sldId id="268"/>
           </p14:sldIdLst>
         </p14:section>
-        <p14:section name="Dati e algoritmi" id="{45792abd-bcc6-2176-da47-e211aa828eb0}">
+        <p14:section name="Dati e algoritmi" id="{13499c6c-585a-b263-c162-704a4bd8a42f}">
           <p14:sldIdLst>
             <p14:sldId id="269"/>
             <p14:sldId id="270"/>

--- a/it/slides/04-Architettura_dei_Calcolatori-Informazione_Digitale.pptx
+++ b/it/slides/04-Architettura_dei_Calcolatori-Informazione_Digitale.pptx
@@ -126,13 +126,13 @@
   <p:extLst>
     <p:ext uri="{521415D9-36F7-43E2-AB2F-B90AF26B5E84}">
       <p14:sectionLst xmlns:p14="http://schemas.microsoft.com/office/powerpoint/2010/main">
-        <p14:section name="Apertura" id="{3cf9070d-9d3c-5473-2962-8738f44fe523}">
+        <p14:section name="Apertura" id="{36b78c6a-18ff-023d-6089-54637b98b978}">
           <p14:sldIdLst>
             <p14:sldId id="256"/>
             <p14:sldId id="257"/>
           </p14:sldIdLst>
         </p14:section>
-        <p14:section name="Informazione" id="{e12a64cb-2e7f-5ead-da03-d0e2c18c13a1}">
+        <p14:section name="Informazione" id="{8b6bd4c4-480b-3b4e-2178-3c7dc6c5c127}">
           <p14:sldIdLst>
             <p14:sldId id="258"/>
             <p14:sldId id="259"/>
@@ -142,7 +142,7 @@
             <p14:sldId id="263"/>
           </p14:sldIdLst>
         </p14:section>
-        <p14:section name="Testo" id="{e3a20d36-5b37-741b-43e1-e7e6e9adbdc9}">
+        <p14:section name="Testo" id="{43d4f3bd-ac2d-f988-c218-48d7fcae94f3}">
           <p14:sldIdLst>
             <p14:sldId id="264"/>
             <p14:sldId id="265"/>
@@ -150,12 +150,12 @@
             <p14:sldId id="267"/>
           </p14:sldIdLst>
         </p14:section>
-        <p14:section name="Strutture dati" id="{f914c46d-bb3c-d893-abd1-a87c65396655}">
+        <p14:section name="Strutture dati" id="{c229c3db-5b16-77bb-ea1a-c00e68098768}">
           <p14:sldIdLst>
             <p14:sldId id="268"/>
           </p14:sldIdLst>
         </p14:section>
-        <p14:section name="Dati e algoritmi" id="{13499c6c-585a-b263-c162-704a4bd8a42f}">
+        <p14:section name="Dati e algoritmi" id="{842d57c3-34af-3cc5-5ca1-9f1e365b7c20}">
           <p14:sldIdLst>
             <p14:sldId id="269"/>
             <p14:sldId id="270"/>
@@ -570,7 +570,7 @@
           <a:p>
             <a:r>
               <a:rPr lang="en-US" dirty="0"/>
-              <a:t>Nella Lezione 02 avete battuto 0x07e0, 255, .asciz e .word senza sapere esattamente che cosa fossero. Questa lezione dà loro un nome. La tesi sta nel sottotitolo: dentro la macchina tutto è una configurazione di bit, che si tratti di un numero, di un colore, di una lettera o di un elenco. La lezione è ampia più che profonda: i numeri sono trattati formalmente nelle due lezioni successive; qui imparate a leggere i bit e a vedere che il loro significato è questione di accordi.
+              <a:t>Nella Lezione 02 lo studente ha scritto 0x07e0, 255, .asciz e .word senza sapere con precisione che cosa denotassero. Questa lezione li nomina. La sua tesi è enunciata nel sottotitolo: tutto ciò che sta dentro la macchina è una configurazione di bit, che sia un numero, un colore, una lettera o un elenco, e il significato di una configurazione è fissato da una convenzione, non dai bit stessi. La lezione privilegia l'ampiezza sulla profondità: la rappresentazione dei numeri si tratta formalmente nelle due lezioni successive, mentre qui lo scopo è imparare a leggere i bit e a riconoscere che l'interpretazione è un accordo.
 Stato di apprendimento: DA COMPRENDERE OGGI, alla fine di questa lezione lo spiegate, lo seguite passo passo e lo applicate da soli; DA UTILIZZARE OGGI, oggi seguite e usate la ricetta; come funziona dentro si spiega più avanti, o non fa parte del corso; DA COMPRENDERE PIÙ AVANTI, riconoscete il nome e lo scopo; lo spiega una lezione successiva. Una slide senza etichetta è contesto: una storia, un esempio, una domanda, un esercizio.
 Stato di apprendimento di questa lezione. DA COMPRENDERE OGGI: analogico e digitale; bit, byte, parola; l'esadecimale; la notazione posizionale; un colore è un numero; caratteri e stringhe; l'ordine little-endian; le strutture dati; gli array in memoria; gli algoritmi. DA UTILIZZARE OGGI: shift come moltiplicazione (Lezione 05) e, usati senza essere studiati nel corso, il programma completo, gli strumenti di PRG32. DA COMPRENDERE PIÙ AVANTI: niente. Una slide senza etichetta è contesto: una storia, un esempio, una domanda, un esercizio.
 Per il docente: Spirale: gli studenti hanno già visto 0x07e0, 255, .asciz e .word nella Lezione 02. Questa lezione dà un nome a quelle cose. Le due lezioni successive (05, 06) trattano i numeri in modo formale.</a:t>
@@ -661,7 +661,7 @@
           <a:p>
             <a:r>
               <a:rPr lang="en-US" dirty="0"/>
-              <a:t>Una stringa è una sequenza di codici di carattere in byte consecutivi. Il problema è sapere dove finisce. La convenzione del C segna la fine con un byte a zero; quella del Pascal scrive prima la lunghezza. La terza riga è la vostra stringa della Lezione 02: .asciz memorizza gli undici caratteri di HELLO PRG32 seguiti da uno zero, dodici byte in tutto. La funzione che disegna il testo riceve solo l'indirizzo del primo byte e legge finché non trova lo zero. Se lo zero mancasse, proseguirebbe con ciò che segue in memoria.
+              <a:t>Una stringa è una sequenza di codici di carattere memorizzati in byte consecutivi, e la questione di progetto è come se ne segni la fine. La convenzione del C mette un byte zero in fondo; quella del Pascal memorizza prima la lunghezza. La terza riga è la stringa della Lezione 02: .asciz memorizza gli undici caratteri di HELLO PRG32 seguiti da uno zero, dodici byte in tutto. La funzione che disegna il testo riceve solo l'indirizzo del primo byte e legge finché non incontra lo zero. Se il terminatore mancasse, proseguirebbe in ciò che si trova dopo in memoria, un errore con una lunga storia nella sicurezza informatica.
 DA COMPRENDERE OGGI: caratteri e stringhe.
 Per il docente: I numeri sotto le celle sono i codici ASCII in esadecimale. È la stringa della Lezione 02, passo 2. Che cosa accade se lo zero manca? La funzione continua a leggere ciò che segue in memoria.</a:t>
             </a:r>
@@ -751,7 +751,7 @@
           <a:p>
             <a:r>
               <a:rPr lang="en-US" dirty="0"/>
-              <a:t>L'ASCII ha 128 caratteri, sufficienti solo per l'inglese. Unicode assegna un numero, detto code point, a ogni carattere di ogni sistema di scrittura. UTF-8 memorizza quel numero in uno-quattro byte: i caratteri dell'ASCII conservano il loro unico byte, una lettera accentata ne prende due, il simbolo dell'euro tre, un'emoji quattro. Due conseguenze. Il testo ASCII puro è già UTF-8 valido. E la lunghezza di una stringa in byte non è più la sua lunghezza in caratteri.
+              <a:t>L'ASCII definisce 128 caratteri, sufficienti per il solo inglese. Unicode assegna un numero, il code point, a ogni carattere di ogni sistema di scrittura. UTF-8 codifica quel numero in uno-quattro byte: i caratteri ASCII conservano il loro singolo byte, una lettera accentata ne prende due, il simbolo dell'euro tre, un'emoji quattro. Ne seguono due conseguenze. Un testo puramente ASCII è già UTF-8 valido, il che spiega l'adozione universale della codifica. E la lunghezza di una stringa in byte non coincide più con la sua lunghezza in caratteri.
 DA COMPRENDERE OGGI: caratteri e stringhe.
 Per il docente: Unicode assegna un numero (code point) a ogni carattere di ogni scrittura; UTF-8 codifica quel numero in uno-quattro byte ed è compatibile con l'ASCII. È la codifica del web e dei vostri file sorgente. Conseguenza: la lunghezza in byte di una stringa non è la sua lunghezza in caratteri.</a:t>
             </a:r>
@@ -841,7 +841,7 @@
           <a:p>
             <a:r>
               <a:rPr lang="en-US" dirty="0"/>
-              <a:t>Una parola sono quattro byte, e la memoria ha un indirizzo per ogni byte: in che ordine si memorizzano i quattro byte? RISC-V è little-endian: il byte meno significativo va all'indirizzo più basso, quindi 0x12345678 si memorizza come 78, 56, 34, 12. L'ordine opposto, big-endian, è quello dei protocolli di rete. Di solito non ci si accorge di nulla, perché lw e sw sono coerenti tra loro. Ci si accorge quando si guarda la memoria byte per byte in un debugger, o si scambiano dati con una macchina diversa.
+              <a:t>Una parola occupa quattro byte e la memoria assegna un indirizzo a ogni byte, quindi va specificato l'ordine in cui i byte sono memorizzati. RISC-V è little-endian: il byte meno significativo occupa l'indirizzo più basso, quindi 0x12345678 si memorizza come 78, 56, 34, 12. La convenzione opposta, big-endian, è usata dai protocolli di rete. Nell'uso ordinario l'ordine è invisibile, perché lw e sw sono coerenti tra loro; diventa visibile quando si ispeziona la memoria byte per byte in un debugger, o quando si scambiano dati con una macchina di convenzione diversa. La Lezione 15 torna sulla questione e la trasforma in un esperimento.
 DA COMPRENDERE OGGI: l'ordine little-endian.
 Per il docente: I nomi vengono dai Viaggi di Gulliver: da quale estremità rompere l'uovo. In PRG32-QT aprite la vista della memoria su una .word e leggete i byte.</a:t>
             </a:r>
@@ -931,7 +931,7 @@
           <a:p>
             <a:r>
               <a:rPr lang="en-US" dirty="0"/>
-              <a:t>Cinque strutture. Un vettore tiene elementi dello stesso tipo uno dopo l'altro e li raggiunge per indice. Una lista collega ogni elemento al successivo: facile da modificare, lenta da percorrere fino a una posizione. Una pila restituisce per primo ciò che è stato messo per ultimo; ne avete usata una nella Lezione 02 per salvare ra. Un dizionario associa chiavi a valori. Un albero è una gerarchia. Il sesto riquadro è quello che conta per questo corso: nella macchina sono tutti byte in memoria, più una regola per trovare l'elemento successivo.
+              <a:t>Cinque modi di organizzare i dati. Un array memorizza elementi dello stesso tipo in posizioni contigue e li raggiunge per indice. Una lista collega ogni elemento al successivo: economica da modificare, lenta da accedere per posizione. Una pila restituisce per primo l'elemento inserito per ultimo, e la si è già usata nella Lezione 02 per salvare ra. Un dizionario associa chiavi a valori. Un albero organizza gli elementi in gerarchia. La sesta scheda enuncia il punto più rilevante per questo corso: dentro la macchina ognuna di queste strutture è un insieme di byte in memoria insieme a una regola per trovare l'elemento successivo.
 DA COMPRENDERE OGGI: le strutture dati.
 Per il docente: Una pila l'avete già usata: il frame che salvava ra nella Lezione 02. Gli esempi sono quelli disegnati sulla slide originale.</a:t>
             </a:r>
@@ -1021,7 +1021,7 @@
           <a:p>
             <a:r>
               <a:rPr lang="en-US" dirty="0"/>
-              <a:t>Un problema è calcolabile se un algoritmo può risolverlo. La macchina di Turing è il modello matematico di un calcolatore con un programma; la macchina di von Neumann è l'architettura che la realizza in hardware. L'ultima riga è quella sorprendente: esistono problemi che nessun algoritmo può risolvere, e quindi che nessun calcolatore risolverà mai, per quanto veloce. L'esempio classico è decidere, per un programma qualsiasi, se si fermerà.
+              <a:t>Un problema è calcolabile se qualche algoritmo lo risolve. La macchina di Turing è il modello matematico di un calcolatore programmato; la macchina di von Neumann è l'architettura che lo realizza in hardware. L'ultima riga è quella sorprendente: esistono problemi che nessun algoritmo può risolvere, e quindi che nessun calcolatore risolverà mai, per quanto veloce. L'esempio classico è il problema della terminazione, decidere per un programma arbitrario se terminerà, che Turing dimostrò indecidibile nel 1936.
 DA COMPRENDERE OGGI: gli algoritmi.
 Per il docente: L'ultima riga è la tesi di Church-Turing, enunciata in modo informale. Il problema della fermata è l'esempio classico di problema non calcolabile.</a:t>
             </a:r>
@@ -1111,7 +1111,7 @@
           <a:p>
             <a:r>
               <a:rPr lang="en-US" dirty="0"/>
-              <a:t>In un algoritmo deterministico lo stesso ingresso produce sempre la stessa sequenza di passi e lo stesso risultato: first_update somma sempre uno. Un algoritmo non deterministico può comportarsi in modo diverso a ogni esecuzione con lo stesso ingresso. Le ragioni comuni sono due: usa di proposito numeri casuali, come un gioco che piazza un nemico a caso, oppure dipende dai tempi di più cose che accadono insieme. Il primo tipo è utile; il secondo è una fonte frequente di bug.
+              <a:t>Un algoritmo deterministico, a parità di ingresso, esegue sempre la stessa sequenza di passi e produce lo stesso risultato: first_update aggiunge sempre uno. Un algoritmo non deterministico può comportarsi diversamente in esecuzioni diverse con lo stesso ingresso. Due cause sono comuni. L'algoritmo può usare deliberatamente numeri casuali, come fa un gioco che piazza un nemico a caso; oppure il suo comportamento può dipendere dalla tempistica relativa di eventi concorrenti. Il primo tipo è una scelta di progetto di grande utilità, come mostrano i test probabilistici di primalità; il secondo è una fonte frequente di errori difficili da riprodurre.
 DA COMPRENDERE OGGI: gli algoritmi.</a:t>
             </a:r>
             <a:endParaRPr lang="en-US" dirty="0"/>
@@ -1200,7 +1200,7 @@
           <a:p>
             <a:r>
               <a:rPr lang="en-US" dirty="0"/>
-              <a:t>Un programma classico è una funzione scritta da una persona: y = f(x). Nel machine learning la funzione non viene scritta: è costruita automaticamente a partire da esempi. I modelli generativi di oggi sono questa idea su scala enorme, con miliardi di numeri appresi. Due osservazioni la collegano a questo corso. Quei numeri sono bit in memoria, moltiplicati e sommati da processori. E un modello può sbagliare con grande sicurezza: solo chi conosce i fondamenti può controllare ciò che dice.
+              <a:t>Un programma classico è una funzione scritta da una persona: y = f(x). Nell'apprendimento automatico la funzione non è scritta ma costruita automaticamente a partire da esempi. I modelli generativi contemporanei applicano questa idea su scala enorme, con miliardi di parametri appresi. Due osservazioni collegano l'argomento a questo corso. Quei parametri sono bit in memoria, moltiplicati e sommati da processori del tipo qui studiato. E un modello può sbagliare con grande sicurezza: solo chi comprende i fondamenti è in grado di verificare ciò che afferma.
 Per il docente: L'ultimo punto si collega alla regola #nogpt del corso: l'esame verifica che i fondamenti stiano nella testa dello studente.</a:t>
             </a:r>
             <a:endParaRPr lang="en-US" dirty="0"/>
@@ -1289,8 +1289,8 @@
           <a:p>
             <a:r>
               <a:rPr lang="en-US" dirty="0"/>
-              <a:t>Applicate la regola per cui n bit danno 2 alla n configurazioni. Un byte ha otto bit. Attenzione ai due quasi-giusti: 8 è il numero dei bit, e 255 è il più grande numero naturale che un byte può contenere, non il numero dei valori, perché conta anche lo zero.
-Scrivete in binario le quattro cifre esadecimali: F è 1111, 8 è 1000, 1 è 0001, F è 1111. Poi tagliate i sedici bit in 5, 6 e 5: rosso 11111, verde 000000, blu 11111. Rosso e blu al massimo, niente verde.
+              <a:t>La prima domanda applica la regola per cui n bit danno 2^n configurazioni a un byte di otto bit. Due quasi-risposte meritano attenzione: 8 è il numero dei bit, e 255 è il più grande numero naturale che un byte può contenere, non il numero dei valori, perché va contato anche lo zero.
+Per la seconda, le quattro cifre esadecimali si scrivono in binario, F come 1111, 8 come 1000, 1 come 0001, F come 1111, e i sedici bit si dividono in 5, 6 e 5: rosso 11111, verde 000000, blu 11111. Rosso e blu sono al massimo e il verde è assente.
 Per il docente: 1. Risposta: D. Un byte sono 8 bit: 2^8 = 256 configurazioni, per esempio i naturali da 0 a 255.
 2. Risposta: B. 0xF81F = 11111 000000 11111: rosso e blu al massimo, verde a zero: magenta.</a:t>
             </a:r>
@@ -1380,8 +1380,8 @@
           <a:p>
             <a:r>
               <a:rPr lang="en-US" dirty="0"/>
-              <a:t>Contate i caratteri e ricordate che cosa aggiunge la z di .asciz. La direttiva memorizza la stringa terminata da zero: un byte in più dei caratteri visibili.
-RISC-V è little-endian. Scrivete la parola come quattro byte, 00 00 AB CD, dal più al meno significativo, e chiedetevi quale va all'indirizzo più basso. La trappola è 0x00, che sarebbe giusta su una macchina big-endian.
+              <a:t>Per la prima domanda si contano i caratteri e si ricorda il significato della z di .asciz: la direttiva memorizza la stringa terminata da zero, aggiungendo un byte ai caratteri visibili.
+Per la seconda, RISC-V è little-endian. La parola si scrive come quattro byte, 00 00 AB CD, dal più al meno significativo, e la domanda è quale di essi occupi l'indirizzo più basso. Il distrattore è 0x00, che sarebbe corretto su una macchina big-endian.
 Per il docente: 1. Risposta: C. Quattro caratteri più il byte di terminazione a zero.
 2. Risposta: C. RISC-V è little-endian: il byte meno significativo, 0xCD, va all'indirizzo più basso.</a:t>
             </a:r>
@@ -1471,7 +1471,7 @@
           <a:p>
             <a:r>
               <a:rPr lang="en-US" dirty="0"/>
-              <a:t>Dodici termini. Word è la parola, e su RV32 significa trentadue bit. Sampling e quantisation, campionamento e quantizzazione, sono le due operazioni della digitalizzazione. Byte order, o endianness, è l'ordine dei byte di una parola in memoria. Notate che stack è la pila, mentre array spesso non si traduce, oppure si rende con vettore.</a:t>
+              <a:t>Dodici termini. Word è parola in italiano, e su RV32 indica trentadue bit. Campionamento e quantizzazione sono le due operazioni della digitalizzazione. L'ordine dei byte, o endianness, è l'ordine in cui sono memorizzati i byte di una parola. La pila traduce lo stack, mentre array spesso resta in inglese o si rende con vettore.</a:t>
             </a:r>
             <a:endParaRPr lang="en-US" dirty="0"/>
           </a:p>
@@ -1559,7 +1559,7 @@
           <a:p>
             <a:r>
               <a:rPr lang="en-US" dirty="0"/>
-              <a:t>Sei obiettivi, dal generale al particolare e ritorno. Saprete distinguere analogico e digitale, leggere un byte in binario e in esadecimale, scomporre un colore PRG32 nei suoi tre campi, dire come si memorizza il testo, e descrivere come un vettore sta in memoria e come l'assembly ne raggiunge un elemento. L'ultimo obiettivo guarda oltre la macchina: che cos'è un algoritmo, quando è deterministico, e dove si colloca il machine learning.</a:t>
+              <a:t>Sei risultati di apprendimento, dal generale al particolare e ritorno. Lo studente saprà distinguere l'informazione analogica da quella digitale, leggere un byte in binario e in esadecimale, decodificare un colore PRG32 nei suoi tre campi, spiegare come si memorizza il testo, e descrivere come un array è disposto in memoria e come l'assembly ne raggiunge un elemento. L'ultimo risultato guarda oltre la macchina: che cos'è un algoritmo, quando è deterministico, e dove si colloca l'apprendimento automatico tra gli algoritmi.</a:t>
             </a:r>
             <a:endParaRPr lang="en-US" dirty="0"/>
           </a:p>
@@ -1647,7 +1647,7 @@
           <a:p>
             <a:r>
               <a:rPr lang="en-US" dirty="0"/>
-              <a:t>Cinque frasi da tenere. L'informazione digitale è una configurazione di bit più una convenzione per leggerla. Gli stessi bit possono essere un numero, un colore o due caratteri: decide il programma. L'esadecimale è il binario scritto in modo compatto, quattro bit per cifra. Il testo è fatto di numeri, e le strutture sono byte più una regola. Gli algoritmi trasformano i dati in informazione su cui fondare decisioni. La prossima lezione tratta formalmente la rappresentazione dei numeri, partendo da un segnalino che esce dal bordo sinistro dello schermo.
+              <a:t>Cinque proposizioni riassumono la lezione. L'informazione digitale è una configurazione di bit insieme a una convenzione per leggerla. Gli stessi bit possono essere un numero, un colore o due caratteri, e il programma decide quale. L'esadecimale è il binario in forma compatta, quattro bit per cifra. Il testo consiste di numeri, e le strutture dati di byte più una regola. Gli algoritmi trasformano i dati in informazione su cui fondare decisioni. La prossima lezione tratta formalmente la rappresentazione dei numeri, a partire da un segnalino che esce dal bordo sinistro dello schermo.
 Stato di apprendimento, riepilogo. DA COMPRENDERE OGGI: analogico e digitale; bit, byte, parola; l'esadecimale; la notazione posizionale; un colore è un numero; caratteri e stringhe; l'ordine little-endian; le strutture dati; gli array in memoria; gli algoritmi. DA UTILIZZARE OGGI: shift come moltiplicazione (Lezione 05) e, usati senza essere studiati nel corso, il programma completo, gli strumenti di PRG32. DA COMPRENDERE PIÙ AVANTI: niente. Una slide senza etichetta è contesto: una storia, un esempio, una domanda, un esercizio.
 Per il docente: Prossima lezione: la rappresentazione dei numeri, in modo formale.</a:t>
             </a:r>
@@ -1737,7 +1737,7 @@
           <a:p>
             <a:r>
               <a:rPr lang="en-US" dirty="0"/>
-              <a:t>Una grandezza analogica varia con continuità, come una tensione o le lancette di un orologio. Una grandezza digitale è una sequenza di simboli presi da un alfabeto finito, come le cifre di un display. Nella figura la curva liscia è il segnale analogico; la scalinata è la sua versione digitale, ottenuta campionando a istanti regolari e quantizzando ogni campione su uno di pochi livelli. Qualcosa si perde, e qualcosa si guadagna: un numero finito di livelli si può contare, copiare senza errori e controllare. Con due soli livelli il simbolo è il bit.
+              <a:t>Una grandezza analogica varia con continuità, come una tensione o le lancette di un orologio. Una grandezza digitale è una sequenza di simboli tratti da un alfabeto finito, come le cifre di un display. Nella figura la curva continua è il segnale analogico e la scalinata è la sua controparte digitale, ottenuta campionando a istanti regolari e quantizzando ogni campione a uno di un numero finito di livelli. Nel processo qualcosa si perde, e si guadagna qualcosa di essenziale: un insieme finito di livelli si può contare, copiare senza errori e verificare. Con due soli livelli il simbolo è il bit, e la Lezione 10 mostrerà perché si preferiscono due livelli.
 DA COMPRENDERE OGGI: analogico e digitale.
 Per il docente: Due livelli si realizzano in modo affidabile con i transistor (spento o acceso): per questo i calcolatori sono binari. L'algebra di Boole (Lezione 08) è la matematica dei due livelli.</a:t>
             </a:r>
@@ -1827,7 +1827,7 @@
           <a:p>
             <a:r>
               <a:rPr lang="en-US" dirty="0"/>
-              <a:t>Le unità dell'informazione, ciascuna legata a qualcosa che avete usato. Un bit è un pulsante. Un nibble, quattro bit, è una cifra esadecimale. Un byte, otto bit, è un carattere ASCII, ed è la ragione per cui la barra della Lezione 02 era larga al massimo 255. Una halfword, sedici bit, è un colore. Una word, o parola, trentadue bit, è un registro e un'istruzione. La regola da ricordare: n bit danno 2 alla n configurazioni. E la didascalia: che cosa significa una configurazione non è scritto nei bit.
+              <a:t>Le unità dell'informazione, ciascuna legata a un oggetto già incontrato. Un bit è un pulsante. Un nibble, quattro bit, è una cifra esadecimale. Un byte, otto bit, è un carattere ASCII, ed è la ragione per cui la barra della Lezione 02 non superava mai i 255 pixel. Una halfword, sedici bit, è un colore PRG32. Una word, trentadue bit, è un registro e un'istruzione. La regola che governa tutto è che n bit danno 2^n configurazioni distinte. La didascalia aggiunge il principio della lezione: che cosa significhi una configurazione non è scritto nei bit.
 DA COMPRENDERE OGGI: bit, byte, parola.
 Per il docente: n bit danno 2^n configurazioni distinte. Che cosa significa una configurazione non è scritto nei bit: è una convenzione tra chi li scrive e chi li legge. Su RV32 una parola è di 32 bit per definizione dell'architettura.</a:t>
             </a:r>
@@ -1917,7 +1917,7 @@
           <a:p>
             <a:r>
               <a:rPr lang="en-US" dirty="0"/>
-              <a:t>Sedici righe da imparare a memoria, come un tempo le tabelline. Ogni riga dà lo stesso numero in decimale, in binario su quattro bit e in esadecimale con una cifra. Le quattro colonne binarie pesano 8, 4, 2 e 1: 1011 è 8 + 2 + 1 = 11, che l'esadecimale scrive B. Dopo il 9 le cifre esadecimali proseguono con le lettere da A a F per i valori da dieci a quindici. Coprite due colonne e ricostruitele dalla terza finché non vi serve più pensarci.
+              <a:t>Sedici righe da imparare a memoria, come un tempo le tabelline. Ogni riga dà lo stesso numero in decimale, in binario a quattro bit e come singola cifra esadecimale. Le quattro posizioni binarie pesano 8, 4, 2 e 1, quindi 1011 vale 8 + 2 + 1 = 11, che l'esadecimale scrive B; dopo il 9 le cifre esadecimali proseguono con le lettere da A a F per i valori da dieci a quindici. Qui conta la scioltezza più della comprensione, perché la comprensione è semplice: l'esercizio consigliato è coprire due colonne e ricostruirle dalla terza, finché non serve più pensarci.
 DA COMPRENDERE OGGI: l'esadecimale.
 Per il docente: Le colonne del numero binario pesano 8, 4, 2, 1. Questa tabella va imparata a memoria: è la tavola pitagorica di questo corso.</a:t>
             </a:r>
@@ -2007,7 +2007,7 @@
           <a:p>
             <a:r>
               <a:rPr lang="en-US" dirty="0"/>
-              <a:t>In un sistema posizionale una cifra vale il suo valore per il peso della sua posizione, e i pesi sono le potenze della base. La slide legge così il byte 11011001: le posizioni pesano 128, 64, 32, 16, 8, 4, 2 e 1; dove il bit è 1 il peso si somma, dove è 0 no. La somma è 128 + 64 + 16 + 8 + 1 = 217. È esattamente ciò che fate in base dieci senza accorgervene: 217 sono 2 centinaia, 1 decina e 7 unità.
+              <a:t>In un sistema posizionale ogni cifra contribuisce con il suo valore moltiplicato per il peso della sua posizione, e i pesi sono potenze successive della base. La slide legge così il byte 11011001: le posizioni pesano 128, 64, 32, 16, 8, 4, 2 e 1, e il peso si somma dove il bit vale 1. La somma è 128 + 64 + 16 + 8 + 1 = 217. È esattamente il procedimento applicato inconsapevolmente in base dieci, dove 217 indica due centinaia, una decina e sette unità. La Lezione 05 enuncia la formula generale e gli algoritmi di conversione.
 DA COMPRENDERE OGGI: la notazione posizionale.
 Per il docente: La Lezione 05 dà la formula generale e gli algoritmi di conversione. Qui lo scopo è soltanto leggere un byte.</a:t>
             </a:r>
@@ -2097,7 +2097,7 @@
           <a:p>
             <a:r>
               <a:rPr lang="en-US" dirty="0"/>
-              <a:t>Sedici è due alla quarta, quindi una cifra esadecimale corrisponde esattamente a quattro bit. Per convertire si taglia il numero binario in gruppi di quattro a partire da destra e si sostituisce ogni gruppo usando la tabella: 0000 0111 1110 0000 diventa 0, 7, E, 0. Non serve alcun calcolo. Per questo i programmatori usano l'esadecimale: è il binario scritto in modo compatto. Un registro sono otto cifre esadecimali invece di trentadue bit. Il prefisso 0x annuncia che un numero è esadecimale.
+              <a:t>Poiché sedici è due alla quarta, ogni cifra esadecimale corrisponde esattamente a quattro bit. La conversione non richiede quindi alcuna aritmetica: il numero binario si divide in gruppi di quattro bit a partire da destra, e ogni gruppo si sostituisce con la sua cifra della tabella, così che 0000 0111 1110 0000 diventa 0, 7, E, 0. È per questo che i programmatori scrivono in esadecimale: è il binario in forma compatta, con un registro che occupa otto cifre esadecimali invece di trentadue bit. Il prefisso 0x indica che un numero è esadecimale.
 DA COMPRENDERE OGGI: l'esadecimale.
 Per il docente: 0x07E0 = 7 x 256 + 14 x 16 = 1792 + 224 = 2016. Il valore decimale qui è inutile: conta la configurazione di bit, come mostra la slide successiva.</a:t>
             </a:r>
@@ -2187,7 +2187,7 @@
           <a:p>
             <a:r>
               <a:rPr lang="en-US" dirty="0"/>
-              <a:t>Qui si apre il verde della Lezione 02. Un colore PRG32 sono sedici bit divisi in tre campi: cinque bit di rosso, sei di verde, cinque di blu. Il formato si chiama RGB565. In 0x07E0 il campo rosso è 00000, il campo verde è 111111 e il campo blu è 00000: verde al massimo e nient'altro. Gli otto campioni mostrano altre combinazioni: il giallo è rosso più verde, il bianco è tutto. La frase in fondo è la lezione dell'intera lezione: gli stessi sedici bit potrebbero essere tutt'altro.
+              <a:t>Qui si apre il verde della Lezione 02. Un colore PRG32 è una grandezza a sedici bit divisa in tre campi: cinque bit di rosso, sei di verde, cinque di blu, un formato noto come RGB565. In 0x07E0 il campo rosso è 00000, quello verde 111111 e quello blu 00000: verde massimo e nient'altro. Il bit in più dato al verde riflette la maggiore sensibilità della visione umana a quella componente. I campioni mostrano altre combinazioni: il giallo è rosso più verde, il bianco è ogni campo al massimo. La frase in fondo ribadisce la lezione: gli stessi sedici bit potrebbero significare tutt'altro.
 DA COMPRENDERE OGGI: un colore è un numero.
 Per il docente: L'occhio è più sensibile al verde: per questo al verde spetta il bit in più. Esercizio: che colore è 0xF81F? (rosso e blu al massimo: magenta). Le costanti dei colori sono quelle di prg32.h.</a:t>
             </a:r>
@@ -2277,7 +2277,7 @@
           <a:p>
             <a:r>
               <a:rPr lang="en-US" dirty="0"/>
-              <a:t>L'ASCII assegna un numero a ogni carattere e lo fa stare in un byte. Tre osservazioni dalla tabella. La A maiuscola è 65 e la a minuscola è 97: differiscono di 32, cioè di un solo bit. Il carattere «0» è 48, non zero: una cifra battuta sulla tastiera non è ancora un numero. E ci sono caratteri che non si stampano: l'a capo, 10, e NUL, 0, che incontrerete nella prossima slide come fine di una stringa.
+              <a:t>L'ASCII assegna un numero a ogni carattere e lo fa stare in un byte. Dalla tabella seguono tre osservazioni. La A maiuscola è 65 e la a minuscola 97: differiscono di 32, cioè di un solo bit, il che fa del passaggio tra maiuscole e minuscole un'operazione bit a bit. Il carattere "0" è 48, non zero: una cifra digitata su una tastiera è un codice, non ancora un numero, una distinzione che la Lezione 22 sfrutta quando converte un punteggio in testo. E alcuni caratteri non si stampano: il ritorno a capo, 10, e NUL, 0, che la prossima slide usa come terminatore di una stringa.
 DA COMPRENDERE OGGI: caratteri e stringhe.
 Per il docente: L'ASCII (1963) usa 7 bit: 128 caratteri, solo per l'inglese. Maiuscole e minuscole differiscono solo nel bit 5: xori con 0x20 scambia maiuscolo e minuscolo, un primo assaggio di algebra di Boole sul testo.</a:t>
             </a:r>
@@ -3357,7 +3357,7 @@
                 <a:ea typeface="Calibri" pitchFamily="34" charset="-122"/>
                 <a:cs typeface="Calibri" pitchFamily="34" charset="-120"/>
               </a:rPr>
-              <a:t>04-Architettura_dei_Calcolatori-Informazione_Digitale-Codice.pptx</a:t>
+              <a:t>04-Architettura_dei_Calcolatori-Informazione_Digitale-Lab.pptx</a:t>
             </a:r>
             <a:endParaRPr lang="en-US" sz="1300" dirty="0"/>
           </a:p>

--- a/it/slides/04-Architettura_dei_Calcolatori-Informazione_Digitale.pptx
+++ b/it/slides/04-Architettura_dei_Calcolatori-Informazione_Digitale.pptx
@@ -126,13 +126,13 @@
   <p:extLst>
     <p:ext uri="{521415D9-36F7-43E2-AB2F-B90AF26B5E84}">
       <p14:sectionLst xmlns:p14="http://schemas.microsoft.com/office/powerpoint/2010/main">
-        <p14:section name="Apertura" id="{36b78c6a-18ff-023d-6089-54637b98b978}">
+        <p14:section name="Apertura" id="{555d6d97-3382-9998-e084-57467c1c007e}">
           <p14:sldIdLst>
             <p14:sldId id="256"/>
             <p14:sldId id="257"/>
           </p14:sldIdLst>
         </p14:section>
-        <p14:section name="Informazione" id="{8b6bd4c4-480b-3b4e-2178-3c7dc6c5c127}">
+        <p14:section name="Informazione" id="{46bd1ce2-ef1e-36c8-95d7-6d3bd3e03a7f}">
           <p14:sldIdLst>
             <p14:sldId id="258"/>
             <p14:sldId id="259"/>
@@ -142,7 +142,7 @@
             <p14:sldId id="263"/>
           </p14:sldIdLst>
         </p14:section>
-        <p14:section name="Testo" id="{43d4f3bd-ac2d-f988-c218-48d7fcae94f3}">
+        <p14:section name="Testo" id="{2651eaea-964e-a724-577a-b7398e83e7e9}">
           <p14:sldIdLst>
             <p14:sldId id="264"/>
             <p14:sldId id="265"/>
@@ -150,12 +150,12 @@
             <p14:sldId id="267"/>
           </p14:sldIdLst>
         </p14:section>
-        <p14:section name="Strutture dati" id="{c229c3db-5b16-77bb-ea1a-c00e68098768}">
+        <p14:section name="Strutture dati" id="{cb4cdcd8-24f0-1614-edd0-c72ff8167144}">
           <p14:sldIdLst>
             <p14:sldId id="268"/>
           </p14:sldIdLst>
         </p14:section>
-        <p14:section name="Dati e algoritmi" id="{842d57c3-34af-3cc5-5ca1-9f1e365b7c20}">
+        <p14:section name="Dati e algoritmi" id="{2be624d0-2e88-c63b-0cf5-f1030fcac991}">
           <p14:sldIdLst>
             <p14:sldId id="269"/>
             <p14:sldId id="270"/>

--- a/it/slides/04-Architettura_dei_Calcolatori-Informazione_Digitale.pptx
+++ b/it/slides/04-Architettura_dei_Calcolatori-Informazione_Digitale.pptx
@@ -126,13 +126,13 @@
   <p:extLst>
     <p:ext uri="{521415D9-36F7-43E2-AB2F-B90AF26B5E84}">
       <p14:sectionLst xmlns:p14="http://schemas.microsoft.com/office/powerpoint/2010/main">
-        <p14:section name="Apertura" id="{555d6d97-3382-9998-e084-57467c1c007e}">
+        <p14:section name="Apertura" id="{e5a931f3-2a0f-9e46-a256-b12466712e69}">
           <p14:sldIdLst>
             <p14:sldId id="256"/>
             <p14:sldId id="257"/>
           </p14:sldIdLst>
         </p14:section>
-        <p14:section name="Informazione" id="{46bd1ce2-ef1e-36c8-95d7-6d3bd3e03a7f}">
+        <p14:section name="Informazione" id="{fc858440-733e-081b-b270-b5b5b18d540a}">
           <p14:sldIdLst>
             <p14:sldId id="258"/>
             <p14:sldId id="259"/>
@@ -142,7 +142,7 @@
             <p14:sldId id="263"/>
           </p14:sldIdLst>
         </p14:section>
-        <p14:section name="Testo" id="{2651eaea-964e-a724-577a-b7398e83e7e9}">
+        <p14:section name="Testo" id="{bb9ec155-656f-b4b9-3dc4-beb82778163d}">
           <p14:sldIdLst>
             <p14:sldId id="264"/>
             <p14:sldId id="265"/>
@@ -150,12 +150,12 @@
             <p14:sldId id="267"/>
           </p14:sldIdLst>
         </p14:section>
-        <p14:section name="Strutture dati" id="{cb4cdcd8-24f0-1614-edd0-c72ff8167144}">
+        <p14:section name="Strutture dati" id="{d3dff31f-d1d9-b62a-0ec6-c287322805f4}">
           <p14:sldIdLst>
             <p14:sldId id="268"/>
           </p14:sldIdLst>
         </p14:section>
-        <p14:section name="Dati e algoritmi" id="{2be624d0-2e88-c63b-0cf5-f1030fcac991}">
+        <p14:section name="Dati e algoritmi" id="{14d24c0f-8551-8986-a327-d500843ac923}">
           <p14:sldIdLst>
             <p14:sldId id="269"/>
             <p14:sldId id="270"/>
@@ -573,6 +573,8 @@
               <a:t>Nella Lezione 02 lo studente ha scritto 0x07e0, 255, .asciz e .word senza sapere con precisione che cosa denotassero. Questa lezione li nomina. La sua tesi è enunciata nel sottotitolo: tutto ciò che sta dentro la macchina è una configurazione di bit, che sia un numero, un colore, una lettera o un elenco, e il significato di una configurazione è fissato da una convenzione, non dai bit stessi. La lezione privilegia l'ampiezza sulla profondità: la rappresentazione dei numeri si tratta formalmente nelle due lezioni successive, mentre qui lo scopo è imparare a leggere i bit e a riconoscere che l'interpretazione è un accordo.
 Stato di apprendimento: DA COMPRENDERE OGGI, alla fine di questa lezione lo spiegate, lo seguite passo passo e lo applicate da soli; DA UTILIZZARE OGGI, oggi seguite e usate la ricetta; come funziona dentro si spiega più avanti, o non fa parte del corso; DA COMPRENDERE PIÙ AVANTI, riconoscete il nome e lo scopo; lo spiega una lezione successiva. Una slide senza etichetta è contesto: una storia, un esempio, una domanda, un esercizio.
 Stato di apprendimento di questa lezione. DA COMPRENDERE OGGI: analogico e digitale; bit, byte, parola; l'esadecimale; la notazione posizionale; un colore è un numero; caratteri e stringhe; l'ordine little-endian; le strutture dati; gli array in memoria; gli algoritmi. DA UTILIZZARE OGGI: shift come moltiplicazione (Lezione 05) e, usati senza essere studiati nel corso, il programma completo, gli strumenti di PRG32. DA COMPRENDERE PIÙ AVANTI: niente. Una slide senza etichetta è contesto: una storia, un esempio, una domanda, un esercizio.
+Percorso. I risultati di oggi: (1) distinguere l'informazione analogica da quella digitale e contare i valori che n bit possono rappresentare; (2) codificare numeri, colori e testo in bit: notazione posizionale, esadecimale, RGB565, ASCII; (3) nominare le strutture dati di base e le proprietà di un algoritmo. Si appoggia su: solo ciò che ha preparato la Lezione 01. Prossimo passo: Lezione 05, Rappresentazione dei numeri: gli interi.
+Ponte. Nella Lezione 02 l'istruzione addi t1, t1, 1 è comparsa in memoria come la parola 0x00130313. Oggi gli stessi 32 bit si possono leggere come numero, colore, quattro lettere o istruzione: decide il codice. La Lezione 19 legge l'istruzione campo per campo. Richiamo: Nominate due cose diverse che una parola di 32 bit può significare, e che cosa decide quale significato vale.
 Per il docente: Spirale: gli studenti hanno già visto 0x07e0, 255, .asciz e .word nella Lezione 02. Questa lezione dà un nome a quelle cose. Le due lezioni successive (05, 06) trattano i numeri in modo formale.</a:t>
             </a:r>
             <a:endParaRPr lang="en-US" dirty="0"/>
@@ -1648,7 +1650,7 @@
             <a:r>
               <a:rPr lang="en-US" dirty="0"/>
               <a:t>Cinque proposizioni riassumono la lezione. L'informazione digitale è una configurazione di bit insieme a una convenzione per leggerla. Gli stessi bit possono essere un numero, un colore o due caratteri, e il programma decide quale. L'esadecimale è il binario in forma compatta, quattro bit per cifra. Il testo consiste di numeri, e le strutture dati di byte più una regola. Gli algoritmi trasformano i dati in informazione su cui fondare decisioni. La prossima lezione tratta formalmente la rappresentazione dei numeri, a partire da un segnalino che esce dal bordo sinistro dello schermo.
-Stato di apprendimento, riepilogo. DA COMPRENDERE OGGI: analogico e digitale; bit, byte, parola; l'esadecimale; la notazione posizionale; un colore è un numero; caratteri e stringhe; l'ordine little-endian; le strutture dati; gli array in memoria; gli algoritmi. DA UTILIZZARE OGGI: shift come moltiplicazione (Lezione 05) e, usati senza essere studiati nel corso, il programma completo, gli strumenti di PRG32. DA COMPRENDERE PIÙ AVANTI: niente. Una slide senza etichetta è contesto: una storia, un esempio, una domanda, un esercizio.
+Stato di apprendimento, riepilogo. DA COMPRENDERE OGGI: analogico e digitale; bit, byte, parola; l'esadecimale; la notazione posizionale; un colore è un numero; caratteri e stringhe; l'ordine little-endian; le strutture dati; gli array in memoria; gli algoritmi. DA UTILIZZARE OGGI: shift come moltiplicazione (Lezione 05) e, usati senza essere studiati nel corso, il programma completo, gli strumenti di PRG32. DA COMPRENDERE PIÙ AVANTI: niente. Una slide senza etichetta è contesto: una storia, un esempio, una domanda, un esercizio. Il filo della lezione: I bit da soli non significano nulla: un codice dà loro un significato, e gli stessi 32 bit possono essere un numero, un colore, quattro lettere o un'istruzione. Prossimo passo: i codici degli interi, e che cosa succede quando i bit finiscono. Biglietto d'uscita (da due a quattro minuti, da soli, su carta): 1. Un termometro a mercurio e un display che mostra 21,5 misurano entrambi la temperatura. Quale è analogico e quale digitale? Perché la lettura digitale si può copiare mille volte senza peggiorare? 2. Il pulsante Annulla di un editor cancella prima la modifica più recente, poi quella precedente. Quale delle cinque strutture dati è adatta, e perché non un array letto per indice?
 Per il docente: Prossima lezione: la rappresentazione dei numeri, in modo formale.</a:t>
             </a:r>
             <a:endParaRPr lang="en-US" dirty="0"/>
